--- a/docs/pptx/Ch11_M4D3_ADT_BigO.pptx
+++ b/docs/pptx/Ch11_M4D3_ADT_BigO.pptx
@@ -506,7 +506,11 @@
           <a:p>
             <a:r>
               <a:rPr lang="en-US" dirty="0"/>
-              <a:t/>
+              <a:t>TITRE: ADT résout un problème
+&amp; Évaluation Big O
+Critère: Critère M4 + D3 — Démontrer et évaluer
+Objectif de cette présentation : couvrir les concepts clés pour le critère Critère M4 + D3 — Démontrer et évaluer.
+Durée estimée : 1h30 à 2h avec exercices.</a:t>
             </a:r>
             <a:endParaRPr lang="en-US" dirty="0"/>
           </a:p>
@@ -594,7 +598,12 @@
           <a:p>
             <a:r>
               <a:rPr lang="en-US" dirty="0"/>
-              <a:t/>
+              <a:t>PROF: Pour chaque scénario, demander aux étudiants QUELLE structure et POURQUOI.
+Exercice M4 : donner un problème d'entreprise et demander :
+1. Quelle structure de données ?
+2. Quelles opérations ?
+3. Pourquoi ce choix résout le problème ?
+Exemple : 'Un restaurant veut gérer les commandes par ordre d'arrivée' → Queue.</a:t>
             </a:r>
             <a:endParaRPr lang="en-US" dirty="0"/>
           </a:p>
@@ -682,7 +691,14 @@
           <a:p>
             <a:r>
               <a:rPr lang="en-US" dirty="0"/>
-              <a:t/>
+              <a:t>PROF: Exercice D3 :
+Donner une implémentation de GestionStock avec ArrayList.
+Demander d'analyser :
+- ajouter() : O(?)
+- rechercher() : O(?)
+- supprimer() : O(?)
+Puis demander : 'Et si on utilisait HashMap à la place ?'
+Les complexités changent-elles ?</a:t>
             </a:r>
             <a:endParaRPr lang="en-US" dirty="0"/>
           </a:p>
@@ -770,7 +786,13 @@
           <a:p>
             <a:r>
               <a:rPr lang="en-US" dirty="0"/>
-              <a:t/>
+              <a:t>PROF: Basé sur le document BIG_O.pdf.
+Exemple au tableau :
+int sum = 0;           // 1
+for (int i=0; i&lt;n; i++) // n fois
+    sum += arr[i];     // 1
+T(n) = 1 + n × 1 = n + 1 → O(n)
+Faire calculer aux étudiants la complexité de 5 snippets de code.</a:t>
             </a:r>
             <a:endParaRPr lang="en-US" dirty="0"/>
           </a:p>
@@ -858,7 +880,8 @@
           <a:p>
             <a:r>
               <a:rPr lang="en-US" dirty="0"/>
-              <a:t/>
+              <a:t>PROF: Devoir M4/D3 : choisir un problème d'entreprise, implémenter avec un ADT, et évaluer la complexité de chaque opération.
+Site : Monde 3 Ch11 + Monde 4 Ch12 pour le calculateur Big O.</a:t>
             </a:r>
             <a:endParaRPr lang="en-US" dirty="0"/>
           </a:p>
@@ -1213,7 +1236,7 @@
     <p:bg>
       <p:bgPr>
         <a:solidFill>
-          <a:srgbClr val="1B2A4A"/>
+          <a:srgbClr val="1A0D00"/>
         </a:solidFill>
       </p:bgPr>
     </p:bg>
@@ -1240,200 +1263,7 @@
         <p:spPr>
           <a:xfrm>
             <a:off x="0" y="0"/>
-            <a:ext cx="9144000" cy="1097280"/>
-          </a:xfrm>
-          <a:prstGeom prst="rect">
-            <a:avLst/>
-          </a:prstGeom>
-          <a:solidFill>
-            <a:srgbClr val="065A82"/>
-          </a:solidFill>
-          <a:ln/>
-        </p:spPr>
-      </p:sp>
-      <p:sp>
-        <p:nvSpPr>
-          <p:cNvPr id="3" name="Text 1"/>
-          <p:cNvSpPr/>
-          <p:nvPr/>
-        </p:nvSpPr>
-        <p:spPr>
-          <a:xfrm>
-            <a:off x="731520" y="137160"/>
-            <a:ext cx="2743200" cy="365760"/>
-          </a:xfrm>
-          <a:prstGeom prst="rect">
-            <a:avLst/>
-          </a:prstGeom>
-          <a:noFill/>
-          <a:ln/>
-        </p:spPr>
-        <p:txBody>
-          <a:bodyPr wrap="square" rtlCol="0" anchor="ctr"/>
-          <a:lstStyle/>
-          <a:p>
-            <a:pPr indent="0" marL="0">
-              <a:buNone/>
-            </a:pPr>
-            <a:r>
-              <a:rPr lang="en-US" sz="1400" b="1" dirty="0">
-                <a:solidFill>
-                  <a:srgbClr val="00A896"/>
-                </a:solidFill>
-                <a:latin typeface="Calibri" pitchFamily="34" charset="0"/>
-                <a:ea typeface="Calibri" pitchFamily="34" charset="-122"/>
-                <a:cs typeface="Calibri" pitchFamily="34" charset="-120"/>
-              </a:rPr>
-              <a:t>MONDE 3</a:t>
-            </a:r>
-            <a:endParaRPr lang="en-US" sz="1400" dirty="0"/>
-          </a:p>
-        </p:txBody>
-      </p:sp>
-      <p:sp>
-        <p:nvSpPr>
-          <p:cNvPr id="4" name="Text 2"/>
-          <p:cNvSpPr/>
-          <p:nvPr/>
-        </p:nvSpPr>
-        <p:spPr>
-          <a:xfrm>
-            <a:off x="731520" y="457200"/>
-            <a:ext cx="7315200" cy="457200"/>
-          </a:xfrm>
-          <a:prstGeom prst="rect">
-            <a:avLst/>
-          </a:prstGeom>
-          <a:noFill/>
-          <a:ln/>
-        </p:spPr>
-        <p:txBody>
-          <a:bodyPr wrap="square" rtlCol="0" anchor="ctr"/>
-          <a:lstStyle/>
-          <a:p>
-            <a:pPr indent="0" marL="0">
-              <a:buNone/>
-            </a:pPr>
-            <a:r>
-              <a:rPr lang="en-US" sz="1200" dirty="0">
-                <a:solidFill>
-                  <a:srgbClr val="E2E8F0"/>
-                </a:solidFill>
-                <a:latin typeface="Calibri" pitchFamily="34" charset="0"/>
-                <a:ea typeface="Calibri" pitchFamily="34" charset="-122"/>
-                <a:cs typeface="Calibri" pitchFamily="34" charset="-120"/>
-              </a:rPr>
-              <a:t>UNIT 19 : Data Structures &amp; Algorithms</a:t>
-            </a:r>
-            <a:endParaRPr lang="en-US" sz="1200" dirty="0"/>
-          </a:p>
-        </p:txBody>
-      </p:sp>
-      <p:sp>
-        <p:nvSpPr>
-          <p:cNvPr id="5" name="Text 3"/>
-          <p:cNvSpPr/>
-          <p:nvPr/>
-        </p:nvSpPr>
-        <p:spPr>
-          <a:xfrm>
-            <a:off x="731520" y="1645920"/>
-            <a:ext cx="7315200" cy="640080"/>
-          </a:xfrm>
-          <a:prstGeom prst="rect">
-            <a:avLst/>
-          </a:prstGeom>
-          <a:noFill/>
-          <a:ln/>
-        </p:spPr>
-        <p:txBody>
-          <a:bodyPr wrap="square" rtlCol="0" anchor="ctr"/>
-          <a:lstStyle/>
-          <a:p>
-            <a:pPr indent="0" marL="0">
-              <a:buNone/>
-            </a:pPr>
-            <a:r>
-              <a:rPr lang="en-US" sz="4400" b="1" dirty="0">
-                <a:solidFill>
-                  <a:srgbClr val="FFFFFF"/>
-                </a:solidFill>
-                <a:latin typeface="Trebuchet MS" pitchFamily="34" charset="0"/>
-                <a:ea typeface="Trebuchet MS" pitchFamily="34" charset="-122"/>
-                <a:cs typeface="Trebuchet MS" pitchFamily="34" charset="-120"/>
-              </a:rPr>
-              <a:t>Chapitre 11</a:t>
-            </a:r>
-            <a:endParaRPr lang="en-US" sz="4400" dirty="0"/>
-          </a:p>
-        </p:txBody>
-      </p:sp>
-      <p:sp>
-        <p:nvSpPr>
-          <p:cNvPr id="6" name="Text 4"/>
-          <p:cNvSpPr/>
-          <p:nvPr/>
-        </p:nvSpPr>
-        <p:spPr>
-          <a:xfrm>
-            <a:off x="731520" y="2286000"/>
-            <a:ext cx="7315200" cy="1097280"/>
-          </a:xfrm>
-          <a:prstGeom prst="rect">
-            <a:avLst/>
-          </a:prstGeom>
-          <a:noFill/>
-          <a:ln/>
-        </p:spPr>
-        <p:txBody>
-          <a:bodyPr wrap="square" rtlCol="0" anchor="ctr"/>
-          <a:lstStyle/>
-          <a:p>
-            <a:pPr indent="0" marL="0">
-              <a:buNone/>
-            </a:pPr>
-            <a:r>
-              <a:rPr lang="en-US" sz="3000" b="1" dirty="0">
-                <a:solidFill>
-                  <a:srgbClr val="00A896"/>
-                </a:solidFill>
-                <a:latin typeface="Trebuchet MS" pitchFamily="34" charset="0"/>
-                <a:ea typeface="Trebuchet MS" pitchFamily="34" charset="-122"/>
-                <a:cs typeface="Trebuchet MS" pitchFamily="34" charset="-120"/>
-              </a:rPr>
-              <a:t>L'ADT résout un problème</a:t>
-            </a:r>
-            <a:endParaRPr lang="en-US" sz="3000" dirty="0"/>
-          </a:p>
-          <a:p>
-            <a:pPr indent="0" marL="0">
-              <a:buNone/>
-            </a:pPr>
-            <a:r>
-              <a:rPr lang="en-US" sz="3000" b="1" dirty="0">
-                <a:solidFill>
-                  <a:srgbClr val="00A896"/>
-                </a:solidFill>
-                <a:latin typeface="Trebuchet MS" pitchFamily="34" charset="0"/>
-                <a:ea typeface="Trebuchet MS" pitchFamily="34" charset="-122"/>
-                <a:cs typeface="Trebuchet MS" pitchFamily="34" charset="-120"/>
-              </a:rPr>
-              <a:t>+ Évaluer la complexité</a:t>
-            </a:r>
-            <a:endParaRPr lang="en-US" sz="3000" dirty="0"/>
-          </a:p>
-        </p:txBody>
-      </p:sp>
-      <p:sp>
-        <p:nvSpPr>
-          <p:cNvPr id="7" name="Shape 5"/>
-          <p:cNvSpPr/>
-          <p:nvPr/>
-        </p:nvSpPr>
-        <p:spPr>
-          <a:xfrm>
-            <a:off x="731520" y="3657600"/>
-            <a:ext cx="2286000" cy="54864"/>
+            <a:ext cx="9144000" cy="73152"/>
           </a:xfrm>
           <a:prstGeom prst="rect">
             <a:avLst/>
@@ -1446,14 +1276,14 @@
       </p:sp>
       <p:sp>
         <p:nvSpPr>
-          <p:cNvPr id="8" name="Text 6"/>
+          <p:cNvPr id="3" name="Text 1"/>
           <p:cNvSpPr/>
           <p:nvPr/>
         </p:nvSpPr>
         <p:spPr>
           <a:xfrm>
-            <a:off x="731520" y="3840480"/>
-            <a:ext cx="7315200" cy="731520"/>
+            <a:off x="548640" y="365760"/>
+            <a:ext cx="2743200" cy="365760"/>
           </a:xfrm>
           <a:prstGeom prst="rect">
             <a:avLst/>
@@ -1469,19 +1299,212 @@
               <a:buNone/>
             </a:pPr>
             <a:r>
-              <a:rPr lang="en-US" sz="1300" i="1" dirty="0">
-                <a:solidFill>
-                  <a:srgbClr val="E2E8F0"/>
-                </a:solidFill>
-                <a:latin typeface="Calibri" pitchFamily="34" charset="0"/>
-                <a:ea typeface="Calibri" pitchFamily="34" charset="-122"/>
-                <a:cs typeface="Calibri" pitchFamily="34" charset="-120"/>
-              </a:rPr>
-              <a:t>M4/D3</a:t>
+              <a:rPr lang="en-US" sz="1200" b="1" spc="400" kern="0" dirty="0">
+                <a:solidFill>
+                  <a:srgbClr val="F97316"/>
+                </a:solidFill>
+                <a:latin typeface="Calibri" pitchFamily="34" charset="0"/>
+                <a:ea typeface="Calibri" pitchFamily="34" charset="-122"/>
+                <a:cs typeface="Calibri" pitchFamily="34" charset="-120"/>
+              </a:rPr>
+              <a:t>MONDE 3</a:t>
+            </a:r>
+            <a:endParaRPr lang="en-US" sz="1200" dirty="0"/>
+          </a:p>
+        </p:txBody>
+      </p:sp>
+      <p:sp>
+        <p:nvSpPr>
+          <p:cNvPr id="4" name="Text 2"/>
+          <p:cNvSpPr/>
+          <p:nvPr/>
+        </p:nvSpPr>
+        <p:spPr>
+          <a:xfrm>
+            <a:off x="548640" y="731520"/>
+            <a:ext cx="7315200" cy="365760"/>
+          </a:xfrm>
+          <a:prstGeom prst="rect">
+            <a:avLst/>
+          </a:prstGeom>
+          <a:noFill/>
+          <a:ln/>
+        </p:spPr>
+        <p:txBody>
+          <a:bodyPr wrap="square" rtlCol="0" anchor="ctr"/>
+          <a:lstStyle/>
+          <a:p>
+            <a:pPr indent="0" marL="0">
+              <a:buNone/>
+            </a:pPr>
+            <a:r>
+              <a:rPr lang="en-US" sz="1100" dirty="0">
+                <a:solidFill>
+                  <a:srgbClr val="94A3B8"/>
+                </a:solidFill>
+                <a:latin typeface="Calibri" pitchFamily="34" charset="0"/>
+                <a:ea typeface="Calibri" pitchFamily="34" charset="-122"/>
+                <a:cs typeface="Calibri" pitchFamily="34" charset="-120"/>
+              </a:rPr>
+              <a:t>UNIT 19 : Data Structures &amp; Algorithms</a:t>
+            </a:r>
+            <a:endParaRPr lang="en-US" sz="1100" dirty="0"/>
+          </a:p>
+        </p:txBody>
+      </p:sp>
+      <p:sp>
+        <p:nvSpPr>
+          <p:cNvPr id="5" name="Text 3"/>
+          <p:cNvSpPr/>
+          <p:nvPr/>
+        </p:nvSpPr>
+        <p:spPr>
+          <a:xfrm>
+            <a:off x="548640" y="1371600"/>
+            <a:ext cx="8229600" cy="457200"/>
+          </a:xfrm>
+          <a:prstGeom prst="rect">
+            <a:avLst/>
+          </a:prstGeom>
+          <a:noFill/>
+          <a:ln/>
+        </p:spPr>
+        <p:txBody>
+          <a:bodyPr wrap="square" rtlCol="0" anchor="ctr"/>
+          <a:lstStyle/>
+          <a:p>
+            <a:pPr indent="0" marL="0">
+              <a:buNone/>
+            </a:pPr>
+            <a:r>
+              <a:rPr lang="en-US" sz="1400" b="1" dirty="0">
+                <a:solidFill>
+                  <a:srgbClr val="F97316"/>
+                </a:solidFill>
+                <a:latin typeface="Calibri" pitchFamily="34" charset="0"/>
+                <a:ea typeface="Calibri" pitchFamily="34" charset="-122"/>
+                <a:cs typeface="Calibri" pitchFamily="34" charset="-120"/>
+              </a:rPr>
+              <a:t>Chapitre 11</a:t>
+            </a:r>
+            <a:endParaRPr lang="en-US" sz="1400" dirty="0"/>
+          </a:p>
+        </p:txBody>
+      </p:sp>
+      <p:sp>
+        <p:nvSpPr>
+          <p:cNvPr id="6" name="Text 4"/>
+          <p:cNvSpPr/>
+          <p:nvPr/>
+        </p:nvSpPr>
+        <p:spPr>
+          <a:xfrm>
+            <a:off x="548640" y="2011680"/>
+            <a:ext cx="8229600" cy="1371600"/>
+          </a:xfrm>
+          <a:prstGeom prst="rect">
+            <a:avLst/>
+          </a:prstGeom>
+          <a:noFill/>
+          <a:ln/>
+        </p:spPr>
+        <p:txBody>
+          <a:bodyPr wrap="square" rtlCol="0" anchor="ctr"/>
+          <a:lstStyle/>
+          <a:p>
+            <a:pPr indent="0" marL="0">
+              <a:buNone/>
+            </a:pPr>
+            <a:r>
+              <a:rPr lang="en-US" sz="3600" b="1" dirty="0">
+                <a:solidFill>
+                  <a:srgbClr val="FFFFFF"/>
+                </a:solidFill>
+                <a:latin typeface="Calibri" pitchFamily="34" charset="0"/>
+                <a:ea typeface="Calibri" pitchFamily="34" charset="-122"/>
+                <a:cs typeface="Calibri" pitchFamily="34" charset="-120"/>
+              </a:rPr>
+              <a:t>ADT résout un problème</a:t>
+            </a:r>
+            <a:endParaRPr lang="en-US" sz="3600" dirty="0"/>
+          </a:p>
+          <a:p>
+            <a:pPr indent="0" marL="0">
+              <a:buNone/>
+            </a:pPr>
+            <a:r>
+              <a:rPr lang="en-US" sz="3600" b="1" dirty="0">
+                <a:solidFill>
+                  <a:srgbClr val="FFFFFF"/>
+                </a:solidFill>
+                <a:latin typeface="Calibri" pitchFamily="34" charset="0"/>
+                <a:ea typeface="Calibri" pitchFamily="34" charset="-122"/>
+                <a:cs typeface="Calibri" pitchFamily="34" charset="-120"/>
+              </a:rPr>
+              <a:t>&amp; Évaluation Big O</a:t>
+            </a:r>
+            <a:endParaRPr lang="en-US" sz="3600" dirty="0"/>
+          </a:p>
+        </p:txBody>
+      </p:sp>
+      <p:sp>
+        <p:nvSpPr>
+          <p:cNvPr id="7" name="Text 5"/>
+          <p:cNvSpPr/>
+          <p:nvPr/>
+        </p:nvSpPr>
+        <p:spPr>
+          <a:xfrm>
+            <a:off x="548640" y="3657600"/>
+            <a:ext cx="8229600" cy="365760"/>
+          </a:xfrm>
+          <a:prstGeom prst="rect">
+            <a:avLst/>
+          </a:prstGeom>
+          <a:noFill/>
+          <a:ln/>
+        </p:spPr>
+        <p:txBody>
+          <a:bodyPr wrap="square" rtlCol="0" anchor="ctr"/>
+          <a:lstStyle/>
+          <a:p>
+            <a:pPr indent="0" marL="0">
+              <a:buNone/>
+            </a:pPr>
+            <a:r>
+              <a:rPr lang="en-US" sz="1300" dirty="0">
+                <a:solidFill>
+                  <a:srgbClr val="94A3B8"/>
+                </a:solidFill>
+                <a:latin typeface="Calibri" pitchFamily="34" charset="0"/>
+                <a:ea typeface="Calibri" pitchFamily="34" charset="-122"/>
+                <a:cs typeface="Calibri" pitchFamily="34" charset="-120"/>
+              </a:rPr>
+              <a:t>Critère M4 + D3 — Démontrer et évaluer</a:t>
             </a:r>
             <a:endParaRPr lang="en-US" sz="1300" dirty="0"/>
           </a:p>
         </p:txBody>
+      </p:sp>
+      <p:sp>
+        <p:nvSpPr>
+          <p:cNvPr id="8" name="Shape 6"/>
+          <p:cNvSpPr/>
+          <p:nvPr/>
+        </p:nvSpPr>
+        <p:spPr>
+          <a:xfrm>
+            <a:off x="0" y="5074920"/>
+            <a:ext cx="9144000" cy="73152"/>
+          </a:xfrm>
+          <a:prstGeom prst="rect">
+            <a:avLst/>
+          </a:prstGeom>
+          <a:solidFill>
+            <a:srgbClr val="F97316"/>
+          </a:solidFill>
+          <a:ln/>
+        </p:spPr>
       </p:sp>
     </p:spTree>
   </p:cSld>
@@ -1497,7 +1520,7 @@
     <p:bg>
       <p:bgPr>
         <a:solidFill>
-          <a:srgbClr val="F8FAFC"/>
+          <a:srgbClr val="1A0D00"/>
         </a:solidFill>
       </p:bgPr>
     </p:bg>
@@ -1524,13 +1547,13 @@
         <p:spPr>
           <a:xfrm>
             <a:off x="0" y="0"/>
-            <a:ext cx="109728" cy="5143500"/>
+            <a:ext cx="9144000" cy="54864"/>
           </a:xfrm>
           <a:prstGeom prst="rect">
             <a:avLst/>
           </a:prstGeom>
           <a:solidFill>
-            <a:srgbClr val="DC2626"/>
+            <a:srgbClr val="F97316"/>
           </a:solidFill>
           <a:ln/>
         </p:spPr>
@@ -1543,7 +1566,7 @@
         </p:nvSpPr>
         <p:spPr>
           <a:xfrm>
-            <a:off x="457200" y="274320"/>
+            <a:off x="548640" y="274320"/>
             <a:ext cx="8229600" cy="548640"/>
           </a:xfrm>
           <a:prstGeom prst="rect">
@@ -1560,17 +1583,17 @@
               <a:buNone/>
             </a:pPr>
             <a:r>
-              <a:rPr lang="en-US" sz="2600" b="1" dirty="0">
-                <a:solidFill>
-                  <a:srgbClr val="1B2A4A"/>
-                </a:solidFill>
-                <a:latin typeface="Trebuchet MS" pitchFamily="34" charset="0"/>
-                <a:ea typeface="Trebuchet MS" pitchFamily="34" charset="-122"/>
-                <a:cs typeface="Trebuchet MS" pitchFamily="34" charset="-120"/>
-              </a:rPr>
-              <a:t>M4 : Démontrer que l'ADT résout le problème</a:t>
-            </a:r>
-            <a:endParaRPr lang="en-US" sz="2600" dirty="0"/>
+              <a:rPr lang="en-US" sz="2400" b="1" dirty="0">
+                <a:solidFill>
+                  <a:srgbClr val="FFFFFF"/>
+                </a:solidFill>
+                <a:latin typeface="Calibri" pitchFamily="34" charset="0"/>
+                <a:ea typeface="Calibri" pitchFamily="34" charset="-122"/>
+                <a:cs typeface="Calibri" pitchFamily="34" charset="-120"/>
+              </a:rPr>
+              <a:t>M4 : L'ADT résout un problème concret</a:t>
+            </a:r>
+            <a:endParaRPr lang="en-US" sz="2400" dirty="0"/>
           </a:p>
         </p:txBody>
       </p:sp>
@@ -1582,8 +1605,8 @@
         </p:nvSpPr>
         <p:spPr>
           <a:xfrm>
-            <a:off x="640080" y="1005840"/>
-            <a:ext cx="7772400" cy="457200"/>
+            <a:off x="548640" y="1005840"/>
+            <a:ext cx="8046720" cy="3657600"/>
           </a:xfrm>
           <a:prstGeom prst="rect">
             <a:avLst/>
@@ -1592,223 +1615,110 @@
           <a:ln/>
         </p:spPr>
         <p:txBody>
-          <a:bodyPr wrap="square" rtlCol="0" anchor="ctr"/>
+          <a:bodyPr wrap="square" rtlCol="0" anchor="t"/>
           <a:lstStyle/>
           <a:p>
             <a:pPr marL="342900" indent="-342900">
+              <a:lnSpc>
+                <a:spcPct val="130000"/>
+              </a:lnSpc>
               <a:buSzPct val="100000"/>
               <a:buChar char="•"/>
             </a:pPr>
             <a:r>
               <a:rPr lang="en-US" sz="1400" dirty="0">
                 <a:solidFill>
-                  <a:srgbClr val="334155"/>
-                </a:solidFill>
-                <a:latin typeface="Calibri" pitchFamily="34" charset="0"/>
-                <a:ea typeface="Calibri" pitchFamily="34" charset="-122"/>
-                <a:cs typeface="Calibri" pitchFamily="34" charset="-120"/>
-              </a:rPr>
-              <a:t>ÉTAPE 1 : Décrire le problème concret (ex: gérer les contacts d'une entreprise)</a:t>
+                  <a:srgbClr val="E2E8F0"/>
+                </a:solidFill>
+                <a:latin typeface="Calibri" pitchFamily="34" charset="0"/>
+                <a:ea typeface="Calibri" pitchFamily="34" charset="-122"/>
+                <a:cs typeface="Calibri" pitchFamily="34" charset="-120"/>
+              </a:rPr>
+              <a:t>Choisir la bonne structure de données pour le problème</a:t>
             </a:r>
             <a:endParaRPr lang="en-US" sz="1400" dirty="0"/>
           </a:p>
-        </p:txBody>
-      </p:sp>
-      <p:sp>
-        <p:nvSpPr>
-          <p:cNvPr id="5" name="Text 3"/>
-          <p:cNvSpPr/>
-          <p:nvPr/>
-        </p:nvSpPr>
-        <p:spPr>
-          <a:xfrm>
-            <a:off x="640080" y="1554480"/>
-            <a:ext cx="7772400" cy="457200"/>
-          </a:xfrm>
-          <a:prstGeom prst="rect">
-            <a:avLst/>
-          </a:prstGeom>
-          <a:noFill/>
-          <a:ln/>
-        </p:spPr>
-        <p:txBody>
-          <a:bodyPr wrap="square" rtlCol="0" anchor="ctr"/>
-          <a:lstStyle/>
           <a:p>
             <a:pPr marL="342900" indent="-342900">
+              <a:lnSpc>
+                <a:spcPct val="130000"/>
+              </a:lnSpc>
               <a:buSzPct val="100000"/>
               <a:buChar char="•"/>
             </a:pPr>
             <a:r>
               <a:rPr lang="en-US" sz="1400" dirty="0">
                 <a:solidFill>
-                  <a:srgbClr val="334155"/>
-                </a:solidFill>
-                <a:latin typeface="Calibri" pitchFamily="34" charset="0"/>
-                <a:ea typeface="Calibri" pitchFamily="34" charset="-122"/>
-                <a:cs typeface="Calibri" pitchFamily="34" charset="-120"/>
-              </a:rPr>
-              <a:t>ÉTAPE 2 : Justifier le choix de l'ADT (pourquoi HashMap et pas ArrayList ?)</a:t>
+                  <a:srgbClr val="E2E8F0"/>
+                </a:solidFill>
+                <a:latin typeface="Calibri" pitchFamily="34" charset="0"/>
+                <a:ea typeface="Calibri" pitchFamily="34" charset="-122"/>
+                <a:cs typeface="Calibri" pitchFamily="34" charset="-120"/>
+              </a:rPr>
+              <a:t>Cinéma : file d'attente → Queue FIFO</a:t>
             </a:r>
             <a:endParaRPr lang="en-US" sz="1400" dirty="0"/>
           </a:p>
-        </p:txBody>
-      </p:sp>
-      <p:sp>
-        <p:nvSpPr>
-          <p:cNvPr id="6" name="Text 4"/>
-          <p:cNvSpPr/>
-          <p:nvPr/>
-        </p:nvSpPr>
-        <p:spPr>
-          <a:xfrm>
-            <a:off x="640080" y="2103120"/>
-            <a:ext cx="7772400" cy="457200"/>
-          </a:xfrm>
-          <a:prstGeom prst="rect">
-            <a:avLst/>
-          </a:prstGeom>
-          <a:noFill/>
-          <a:ln/>
-        </p:spPr>
-        <p:txBody>
-          <a:bodyPr wrap="square" rtlCol="0" anchor="ctr"/>
-          <a:lstStyle/>
           <a:p>
             <a:pPr marL="342900" indent="-342900">
+              <a:lnSpc>
+                <a:spcPct val="130000"/>
+              </a:lnSpc>
               <a:buSzPct val="100000"/>
               <a:buChar char="•"/>
             </a:pPr>
             <a:r>
               <a:rPr lang="en-US" sz="1400" dirty="0">
                 <a:solidFill>
-                  <a:srgbClr val="334155"/>
-                </a:solidFill>
-                <a:latin typeface="Calibri" pitchFamily="34" charset="0"/>
-                <a:ea typeface="Calibri" pitchFamily="34" charset="-122"/>
-                <a:cs typeface="Calibri" pitchFamily="34" charset="-120"/>
-              </a:rPr>
-              <a:t>ÉTAPE 3 : Montrer le code qui résout le problème (CRUD complet)</a:t>
+                  <a:srgbClr val="E2E8F0"/>
+                </a:solidFill>
+                <a:latin typeface="Calibri" pitchFamily="34" charset="0"/>
+                <a:ea typeface="Calibri" pitchFamily="34" charset="-122"/>
+                <a:cs typeface="Calibri" pitchFamily="34" charset="-120"/>
+              </a:rPr>
+              <a:t>Pharmacie : stock de médicaments → HashMap (recherche par nom)</a:t>
             </a:r>
             <a:endParaRPr lang="en-US" sz="1400" dirty="0"/>
           </a:p>
-        </p:txBody>
-      </p:sp>
-      <p:sp>
-        <p:nvSpPr>
-          <p:cNvPr id="7" name="Text 5"/>
-          <p:cNvSpPr/>
-          <p:nvPr/>
-        </p:nvSpPr>
-        <p:spPr>
-          <a:xfrm>
-            <a:off x="640080" y="2651760"/>
-            <a:ext cx="7772400" cy="457200"/>
-          </a:xfrm>
-          <a:prstGeom prst="rect">
-            <a:avLst/>
-          </a:prstGeom>
-          <a:noFill/>
-          <a:ln/>
-        </p:spPr>
-        <p:txBody>
-          <a:bodyPr wrap="square" rtlCol="0" anchor="ctr"/>
-          <a:lstStyle/>
           <a:p>
             <a:pPr marL="342900" indent="-342900">
+              <a:lnSpc>
+                <a:spcPct val="130000"/>
+              </a:lnSpc>
               <a:buSzPct val="100000"/>
               <a:buChar char="•"/>
             </a:pPr>
             <a:r>
               <a:rPr lang="en-US" sz="1400" dirty="0">
                 <a:solidFill>
-                  <a:srgbClr val="334155"/>
-                </a:solidFill>
-                <a:latin typeface="Calibri" pitchFamily="34" charset="0"/>
-                <a:ea typeface="Calibri" pitchFamily="34" charset="-122"/>
-                <a:cs typeface="Calibri" pitchFamily="34" charset="-120"/>
-              </a:rPr>
-              <a:t>ÉTAPE 4 : Tester avec des données réalistes (pas juste 2-3 éléments)</a:t>
+                  <a:srgbClr val="E2E8F0"/>
+                </a:solidFill>
+                <a:latin typeface="Calibri" pitchFamily="34" charset="0"/>
+                <a:ea typeface="Calibri" pitchFamily="34" charset="-122"/>
+                <a:cs typeface="Calibri" pitchFamily="34" charset="-120"/>
+              </a:rPr>
+              <a:t>IT Support : tickets prioritaires → PriorityQueue</a:t>
             </a:r>
             <a:endParaRPr lang="en-US" sz="1400" dirty="0"/>
           </a:p>
-        </p:txBody>
-      </p:sp>
-      <p:sp>
-        <p:nvSpPr>
-          <p:cNvPr id="8" name="Text 6"/>
-          <p:cNvSpPr/>
-          <p:nvPr/>
-        </p:nvSpPr>
-        <p:spPr>
-          <a:xfrm>
-            <a:off x="640080" y="3200400"/>
-            <a:ext cx="7772400" cy="457200"/>
-          </a:xfrm>
-          <a:prstGeom prst="rect">
-            <a:avLst/>
-          </a:prstGeom>
-          <a:noFill/>
-          <a:ln/>
-        </p:spPr>
-        <p:txBody>
-          <a:bodyPr wrap="square" rtlCol="0" anchor="ctr"/>
-          <a:lstStyle/>
           <a:p>
             <a:pPr marL="342900" indent="-342900">
+              <a:lnSpc>
+                <a:spcPct val="130000"/>
+              </a:lnSpc>
               <a:buSzPct val="100000"/>
               <a:buChar char="•"/>
             </a:pPr>
             <a:r>
               <a:rPr lang="en-US" sz="1400" dirty="0">
                 <a:solidFill>
-                  <a:srgbClr val="334155"/>
-                </a:solidFill>
-                <a:latin typeface="Calibri" pitchFamily="34" charset="0"/>
-                <a:ea typeface="Calibri" pitchFamily="34" charset="-122"/>
-                <a:cs typeface="Calibri" pitchFamily="34" charset="-120"/>
-              </a:rPr>
-              <a:t>ÉTAPE 5 : Montrer les résultats (screenshots des tests JUnit passant)</a:t>
-            </a:r>
-            <a:endParaRPr lang="en-US" sz="1400" dirty="0"/>
-          </a:p>
-        </p:txBody>
-      </p:sp>
-      <p:sp>
-        <p:nvSpPr>
-          <p:cNvPr id="9" name="Text 7"/>
-          <p:cNvSpPr/>
-          <p:nvPr/>
-        </p:nvSpPr>
-        <p:spPr>
-          <a:xfrm>
-            <a:off x="640080" y="3749040"/>
-            <a:ext cx="7772400" cy="457200"/>
-          </a:xfrm>
-          <a:prstGeom prst="rect">
-            <a:avLst/>
-          </a:prstGeom>
-          <a:noFill/>
-          <a:ln/>
-        </p:spPr>
-        <p:txBody>
-          <a:bodyPr wrap="square" rtlCol="0" anchor="ctr"/>
-          <a:lstStyle/>
-          <a:p>
-            <a:pPr marL="342900" indent="-342900">
-              <a:buSzPct val="100000"/>
-              <a:buChar char="•"/>
-            </a:pPr>
-            <a:r>
-              <a:rPr lang="en-US" sz="1400" dirty="0">
-                <a:solidFill>
-                  <a:srgbClr val="334155"/>
-                </a:solidFill>
-                <a:latin typeface="Calibri" pitchFamily="34" charset="0"/>
-                <a:ea typeface="Calibri" pitchFamily="34" charset="-122"/>
-                <a:cs typeface="Calibri" pitchFamily="34" charset="-120"/>
-              </a:rPr>
-              <a:t>Le mot clé est DÉMONTRER — pas juste coder, mais PROUVER que ça marche</a:t>
+                  <a:srgbClr val="E2E8F0"/>
+                </a:solidFill>
+                <a:latin typeface="Calibri" pitchFamily="34" charset="0"/>
+                <a:ea typeface="Calibri" pitchFamily="34" charset="-122"/>
+                <a:cs typeface="Calibri" pitchFamily="34" charset="-120"/>
+              </a:rPr>
+              <a:t>Navigation web : historique → Stack LIFO</a:t>
             </a:r>
             <a:endParaRPr lang="en-US" sz="1400" dirty="0"/>
           </a:p>
@@ -1828,7 +1738,7 @@
     <p:bg>
       <p:bgPr>
         <a:solidFill>
-          <a:srgbClr val="F8FAFC"/>
+          <a:srgbClr val="1A0D00"/>
         </a:solidFill>
       </p:bgPr>
     </p:bg>
@@ -1855,13 +1765,13 @@
         <p:spPr>
           <a:xfrm>
             <a:off x="0" y="0"/>
-            <a:ext cx="109728" cy="5143500"/>
+            <a:ext cx="9144000" cy="54864"/>
           </a:xfrm>
           <a:prstGeom prst="rect">
             <a:avLst/>
           </a:prstGeom>
           <a:solidFill>
-            <a:srgbClr val="DC2626"/>
+            <a:srgbClr val="F97316"/>
           </a:solidFill>
           <a:ln/>
         </p:spPr>
@@ -1874,7 +1784,7 @@
         </p:nvSpPr>
         <p:spPr>
           <a:xfrm>
-            <a:off x="457200" y="274320"/>
+            <a:off x="548640" y="274320"/>
             <a:ext cx="8229600" cy="548640"/>
           </a:xfrm>
           <a:prstGeom prst="rect">
@@ -1891,17 +1801,17 @@
               <a:buNone/>
             </a:pPr>
             <a:r>
-              <a:rPr lang="en-US" sz="2600" b="1" dirty="0">
-                <a:solidFill>
-                  <a:srgbClr val="1B2A4A"/>
-                </a:solidFill>
-                <a:latin typeface="Trebuchet MS" pitchFamily="34" charset="0"/>
-                <a:ea typeface="Trebuchet MS" pitchFamily="34" charset="-122"/>
-                <a:cs typeface="Trebuchet MS" pitchFamily="34" charset="-120"/>
-              </a:rPr>
-              <a:t>D3 : Évaluer la complexité de l'implémentation</a:t>
-            </a:r>
-            <a:endParaRPr lang="en-US" sz="2600" dirty="0"/>
+              <a:rPr lang="en-US" sz="2400" b="1" dirty="0">
+                <a:solidFill>
+                  <a:srgbClr val="FFFFFF"/>
+                </a:solidFill>
+                <a:latin typeface="Calibri" pitchFamily="34" charset="0"/>
+                <a:ea typeface="Calibri" pitchFamily="34" charset="-122"/>
+                <a:cs typeface="Calibri" pitchFamily="34" charset="-120"/>
+              </a:rPr>
+              <a:t>D3 : Évaluer la complexité</a:t>
+            </a:r>
+            <a:endParaRPr lang="en-US" sz="2400" dirty="0"/>
           </a:p>
         </p:txBody>
       </p:sp>
@@ -1913,8 +1823,8 @@
         </p:nvSpPr>
         <p:spPr>
           <a:xfrm>
-            <a:off x="640080" y="1005840"/>
-            <a:ext cx="7772400" cy="457200"/>
+            <a:off x="548640" y="1005840"/>
+            <a:ext cx="8046720" cy="3657600"/>
           </a:xfrm>
           <a:prstGeom prst="rect">
             <a:avLst/>
@@ -1923,223 +1833,110 @@
           <a:ln/>
         </p:spPr>
         <p:txBody>
-          <a:bodyPr wrap="square" rtlCol="0" anchor="ctr"/>
+          <a:bodyPr wrap="square" rtlCol="0" anchor="t"/>
           <a:lstStyle/>
           <a:p>
             <a:pPr marL="342900" indent="-342900">
+              <a:lnSpc>
+                <a:spcPct val="130000"/>
+              </a:lnSpc>
               <a:buSzPct val="100000"/>
               <a:buChar char="•"/>
             </a:pPr>
             <a:r>
               <a:rPr lang="en-US" sz="1400" dirty="0">
                 <a:solidFill>
-                  <a:srgbClr val="334155"/>
-                </a:solidFill>
-                <a:latin typeface="Calibri" pitchFamily="34" charset="0"/>
-                <a:ea typeface="Calibri" pitchFamily="34" charset="-122"/>
-                <a:cs typeface="Calibri" pitchFamily="34" charset="-120"/>
-              </a:rPr>
-              <a:t>Pour CHAQUE opération de votre ADT, donner la complexité Big O</a:t>
+                  <a:srgbClr val="E2E8F0"/>
+                </a:solidFill>
+                <a:latin typeface="Calibri" pitchFamily="34" charset="0"/>
+                <a:ea typeface="Calibri" pitchFamily="34" charset="-122"/>
+                <a:cs typeface="Calibri" pitchFamily="34" charset="-120"/>
+              </a:rPr>
+              <a:t>Analyser chaque opération de l'ADT implémenté</a:t>
             </a:r>
             <a:endParaRPr lang="en-US" sz="1400" dirty="0"/>
           </a:p>
-        </p:txBody>
-      </p:sp>
-      <p:sp>
-        <p:nvSpPr>
-          <p:cNvPr id="5" name="Text 3"/>
-          <p:cNvSpPr/>
-          <p:nvPr/>
-        </p:nvSpPr>
-        <p:spPr>
-          <a:xfrm>
-            <a:off x="640080" y="1554480"/>
-            <a:ext cx="7772400" cy="457200"/>
-          </a:xfrm>
-          <a:prstGeom prst="rect">
-            <a:avLst/>
-          </a:prstGeom>
-          <a:noFill/>
-          <a:ln/>
-        </p:spPr>
-        <p:txBody>
-          <a:bodyPr wrap="square" rtlCol="0" anchor="ctr"/>
-          <a:lstStyle/>
           <a:p>
             <a:pPr marL="342900" indent="-342900">
+              <a:lnSpc>
+                <a:spcPct val="130000"/>
+              </a:lnSpc>
               <a:buSzPct val="100000"/>
               <a:buChar char="•"/>
             </a:pPr>
             <a:r>
               <a:rPr lang="en-US" sz="1400" dirty="0">
                 <a:solidFill>
-                  <a:srgbClr val="334155"/>
-                </a:solidFill>
-                <a:latin typeface="Calibri" pitchFamily="34" charset="0"/>
-                <a:ea typeface="Calibri" pitchFamily="34" charset="-122"/>
-                <a:cs typeface="Calibri" pitchFamily="34" charset="-120"/>
-              </a:rPr>
-              <a:t>Exemple : HashMap.get() = O(1), LinkedList.get(i) = O(n)</a:t>
+                  <a:srgbClr val="E2E8F0"/>
+                </a:solidFill>
+                <a:latin typeface="Calibri" pitchFamily="34" charset="0"/>
+                <a:ea typeface="Calibri" pitchFamily="34" charset="-122"/>
+                <a:cs typeface="Calibri" pitchFamily="34" charset="-120"/>
+              </a:rPr>
+              <a:t>Comparer avec des alternatives (ArrayList vs LinkedList vs HashMap)</a:t>
             </a:r>
             <a:endParaRPr lang="en-US" sz="1400" dirty="0"/>
           </a:p>
-        </p:txBody>
-      </p:sp>
-      <p:sp>
-        <p:nvSpPr>
-          <p:cNvPr id="6" name="Text 4"/>
-          <p:cNvSpPr/>
-          <p:nvPr/>
-        </p:nvSpPr>
-        <p:spPr>
-          <a:xfrm>
-            <a:off x="640080" y="2103120"/>
-            <a:ext cx="7772400" cy="457200"/>
-          </a:xfrm>
-          <a:prstGeom prst="rect">
-            <a:avLst/>
-          </a:prstGeom>
-          <a:noFill/>
-          <a:ln/>
-        </p:spPr>
-        <p:txBody>
-          <a:bodyPr wrap="square" rtlCol="0" anchor="ctr"/>
-          <a:lstStyle/>
           <a:p>
             <a:pPr marL="342900" indent="-342900">
+              <a:lnSpc>
+                <a:spcPct val="130000"/>
+              </a:lnSpc>
               <a:buSzPct val="100000"/>
               <a:buChar char="•"/>
             </a:pPr>
             <a:r>
               <a:rPr lang="en-US" sz="1400" dirty="0">
                 <a:solidFill>
-                  <a:srgbClr val="334155"/>
-                </a:solidFill>
-                <a:latin typeface="Calibri" pitchFamily="34" charset="0"/>
-                <a:ea typeface="Calibri" pitchFamily="34" charset="-122"/>
-                <a:cs typeface="Calibri" pitchFamily="34" charset="-120"/>
-              </a:rPr>
-              <a:t>Comparer avec une implémentation alternative (si j'avais utilisé X au lieu de Y...)</a:t>
+                  <a:srgbClr val="E2E8F0"/>
+                </a:solidFill>
+                <a:latin typeface="Calibri" pitchFamily="34" charset="0"/>
+                <a:ea typeface="Calibri" pitchFamily="34" charset="-122"/>
+                <a:cs typeface="Calibri" pitchFamily="34" charset="-120"/>
+              </a:rPr>
+              <a:t>Big O : compter les opérations en fonction de n</a:t>
             </a:r>
             <a:endParaRPr lang="en-US" sz="1400" dirty="0"/>
           </a:p>
-        </p:txBody>
-      </p:sp>
-      <p:sp>
-        <p:nvSpPr>
-          <p:cNvPr id="7" name="Text 5"/>
-          <p:cNvSpPr/>
-          <p:nvPr/>
-        </p:nvSpPr>
-        <p:spPr>
-          <a:xfrm>
-            <a:off x="640080" y="2651760"/>
-            <a:ext cx="7772400" cy="457200"/>
-          </a:xfrm>
-          <a:prstGeom prst="rect">
-            <a:avLst/>
-          </a:prstGeom>
-          <a:noFill/>
-          <a:ln/>
-        </p:spPr>
-        <p:txBody>
-          <a:bodyPr wrap="square" rtlCol="0" anchor="ctr"/>
-          <a:lstStyle/>
           <a:p>
             <a:pPr marL="342900" indent="-342900">
+              <a:lnSpc>
+                <a:spcPct val="130000"/>
+              </a:lnSpc>
               <a:buSzPct val="100000"/>
               <a:buChar char="•"/>
             </a:pPr>
             <a:r>
               <a:rPr lang="en-US" sz="1400" dirty="0">
                 <a:solidFill>
-                  <a:srgbClr val="334155"/>
-                </a:solidFill>
-                <a:latin typeface="Calibri" pitchFamily="34" charset="0"/>
-                <a:ea typeface="Calibri" pitchFamily="34" charset="-122"/>
-                <a:cs typeface="Calibri" pitchFamily="34" charset="-120"/>
-              </a:rPr>
-              <a:t>Montrer l'impact sur la PERFORMANCE avec un benchmark (System.nanoTime())</a:t>
+                  <a:srgbClr val="E2E8F0"/>
+                </a:solidFill>
+                <a:latin typeface="Calibri" pitchFamily="34" charset="0"/>
+                <a:ea typeface="Calibri" pitchFamily="34" charset="-122"/>
+                <a:cs typeface="Calibri" pitchFamily="34" charset="-120"/>
+              </a:rPr>
+              <a:t>Meilleur cas, pire cas, cas moyen</a:t>
             </a:r>
             <a:endParaRPr lang="en-US" sz="1400" dirty="0"/>
           </a:p>
-        </p:txBody>
-      </p:sp>
-      <p:sp>
-        <p:nvSpPr>
-          <p:cNvPr id="8" name="Text 6"/>
-          <p:cNvSpPr/>
-          <p:nvPr/>
-        </p:nvSpPr>
-        <p:spPr>
-          <a:xfrm>
-            <a:off x="640080" y="3200400"/>
-            <a:ext cx="7772400" cy="457200"/>
-          </a:xfrm>
-          <a:prstGeom prst="rect">
-            <a:avLst/>
-          </a:prstGeom>
-          <a:noFill/>
-          <a:ln/>
-        </p:spPr>
-        <p:txBody>
-          <a:bodyPr wrap="square" rtlCol="0" anchor="ctr"/>
-          <a:lstStyle/>
           <a:p>
             <a:pPr marL="342900" indent="-342900">
+              <a:lnSpc>
+                <a:spcPct val="130000"/>
+              </a:lnSpc>
               <a:buSzPct val="100000"/>
               <a:buChar char="•"/>
             </a:pPr>
             <a:r>
               <a:rPr lang="en-US" sz="1400" dirty="0">
                 <a:solidFill>
-                  <a:srgbClr val="334155"/>
-                </a:solidFill>
-                <a:latin typeface="Calibri" pitchFamily="34" charset="0"/>
-                <a:ea typeface="Calibri" pitchFamily="34" charset="-122"/>
-                <a:cs typeface="Calibri" pitchFamily="34" charset="-120"/>
-              </a:rPr>
-              <a:t>Discuter les TRADE-OFFS : rapidité vs mémoire, complexité code vs performance</a:t>
-            </a:r>
-            <a:endParaRPr lang="en-US" sz="1400" dirty="0"/>
-          </a:p>
-        </p:txBody>
-      </p:sp>
-      <p:sp>
-        <p:nvSpPr>
-          <p:cNvPr id="9" name="Text 7"/>
-          <p:cNvSpPr/>
-          <p:nvPr/>
-        </p:nvSpPr>
-        <p:spPr>
-          <a:xfrm>
-            <a:off x="640080" y="3749040"/>
-            <a:ext cx="7772400" cy="457200"/>
-          </a:xfrm>
-          <a:prstGeom prst="rect">
-            <a:avLst/>
-          </a:prstGeom>
-          <a:noFill/>
-          <a:ln/>
-        </p:spPr>
-        <p:txBody>
-          <a:bodyPr wrap="square" rtlCol="0" anchor="ctr"/>
-          <a:lstStyle/>
-          <a:p>
-            <a:pPr marL="342900" indent="-342900">
-              <a:buSzPct val="100000"/>
-              <a:buChar char="•"/>
-            </a:pPr>
-            <a:r>
-              <a:rPr lang="en-US" sz="1400" dirty="0">
-                <a:solidFill>
-                  <a:srgbClr val="334155"/>
-                </a:solidFill>
-                <a:latin typeface="Calibri" pitchFamily="34" charset="0"/>
-                <a:ea typeface="Calibri" pitchFamily="34" charset="-122"/>
-                <a:cs typeface="Calibri" pitchFamily="34" charset="-120"/>
-              </a:rPr>
-              <a:t>'Critique' signifie : identifier les forces ET les faiblesses de votre choix</a:t>
+                  <a:srgbClr val="E2E8F0"/>
+                </a:solidFill>
+                <a:latin typeface="Calibri" pitchFamily="34" charset="0"/>
+                <a:ea typeface="Calibri" pitchFamily="34" charset="-122"/>
+                <a:cs typeface="Calibri" pitchFamily="34" charset="-120"/>
+              </a:rPr>
+              <a:t>Justifier le choix de structure par sa complexité</a:t>
             </a:r>
             <a:endParaRPr lang="en-US" sz="1400" dirty="0"/>
           </a:p>
@@ -2159,7 +1956,7 @@
     <p:bg>
       <p:bgPr>
         <a:solidFill>
-          <a:srgbClr val="F8FAFC"/>
+          <a:srgbClr val="1A0D00"/>
         </a:solidFill>
       </p:bgPr>
     </p:bg>
@@ -2186,13 +1983,13 @@
         <p:spPr>
           <a:xfrm>
             <a:off x="0" y="0"/>
-            <a:ext cx="109728" cy="5143500"/>
+            <a:ext cx="9144000" cy="54864"/>
           </a:xfrm>
           <a:prstGeom prst="rect">
             <a:avLst/>
           </a:prstGeom>
           <a:solidFill>
-            <a:srgbClr val="DC2626"/>
+            <a:srgbClr val="F97316"/>
           </a:solidFill>
           <a:ln/>
         </p:spPr>
@@ -2205,8 +2002,8 @@
         </p:nvSpPr>
         <p:spPr>
           <a:xfrm>
-            <a:off x="457200" y="274320"/>
-            <a:ext cx="8229600" cy="457200"/>
+            <a:off x="548640" y="274320"/>
+            <a:ext cx="8229600" cy="548640"/>
           </a:xfrm>
           <a:prstGeom prst="rect">
             <a:avLst/>
@@ -2222,50 +2019,30 @@
               <a:buNone/>
             </a:pPr>
             <a:r>
-              <a:rPr lang="en-US" sz="2600" b="1" dirty="0">
-                <a:solidFill>
-                  <a:srgbClr val="1B2A4A"/>
-                </a:solidFill>
-                <a:latin typeface="Trebuchet MS" pitchFamily="34" charset="0"/>
-                <a:ea typeface="Trebuchet MS" pitchFamily="34" charset="-122"/>
-                <a:cs typeface="Trebuchet MS" pitchFamily="34" charset="-120"/>
-              </a:rPr>
-              <a:t>Exemple : benchmark pour D3</a:t>
-            </a:r>
-            <a:endParaRPr lang="en-US" sz="2600" dirty="0"/>
-          </a:p>
-        </p:txBody>
-      </p:sp>
-      <p:sp>
-        <p:nvSpPr>
-          <p:cNvPr id="4" name="Shape 2"/>
+              <a:rPr lang="en-US" sz="2400" b="1" dirty="0">
+                <a:solidFill>
+                  <a:srgbClr val="FFFFFF"/>
+                </a:solidFill>
+                <a:latin typeface="Calibri" pitchFamily="34" charset="0"/>
+                <a:ea typeface="Calibri" pitchFamily="34" charset="-122"/>
+                <a:cs typeface="Calibri" pitchFamily="34" charset="-120"/>
+              </a:rPr>
+              <a:t>Règles de calcul Big O</a:t>
+            </a:r>
+            <a:endParaRPr lang="en-US" sz="2400" dirty="0"/>
+          </a:p>
+        </p:txBody>
+      </p:sp>
+      <p:sp>
+        <p:nvSpPr>
+          <p:cNvPr id="4" name="Text 2"/>
           <p:cNvSpPr/>
           <p:nvPr/>
         </p:nvSpPr>
         <p:spPr>
           <a:xfrm>
-            <a:off x="457200" y="822960"/>
-            <a:ext cx="8229600" cy="3840480"/>
-          </a:xfrm>
-          <a:prstGeom prst="rect">
-            <a:avLst/>
-          </a:prstGeom>
-          <a:solidFill>
-            <a:srgbClr val="1E293B"/>
-          </a:solidFill>
-          <a:ln/>
-        </p:spPr>
-      </p:sp>
-      <p:sp>
-        <p:nvSpPr>
-          <p:cNvPr id="5" name="Text 3"/>
-          <p:cNvSpPr/>
-          <p:nvPr/>
-        </p:nvSpPr>
-        <p:spPr>
-          <a:xfrm>
-            <a:off x="640080" y="914400"/>
-            <a:ext cx="7863840" cy="3657600"/>
+            <a:off x="548640" y="1005840"/>
+            <a:ext cx="8046720" cy="3657600"/>
           </a:xfrm>
           <a:prstGeom prst="rect">
             <a:avLst/>
@@ -2274,540 +2051,133 @@
           <a:ln/>
         </p:spPr>
         <p:txBody>
-          <a:bodyPr wrap="square" rtlCol="0" anchor="ctr"/>
-          <a:lstStyle/>
-          <a:p>
-            <a:pPr indent="0" marL="0">
-              <a:buNone/>
-            </a:pPr>
-            <a:r>
-              <a:rPr lang="en-US" sz="1100" dirty="0">
-                <a:solidFill>
-                  <a:srgbClr val="64748B"/>
-                </a:solidFill>
-                <a:latin typeface="Consolas" pitchFamily="34" charset="0"/>
-                <a:ea typeface="Consolas" pitchFamily="34" charset="-122"/>
-                <a:cs typeface="Consolas" pitchFamily="34" charset="-120"/>
-              </a:rPr>
-              <a:t>// Comparer LinkedList vs ArrayList pour get(index)</a:t>
-            </a:r>
-            <a:endParaRPr lang="en-US" sz="1100" dirty="0"/>
-          </a:p>
-          <a:p>
-            <a:pPr indent="0" marL="0">
-              <a:buNone/>
-            </a:pPr>
-            <a:r>
-              <a:rPr lang="en-US" sz="1100" dirty="0">
+          <a:bodyPr wrap="square" rtlCol="0" anchor="t"/>
+          <a:lstStyle/>
+          <a:p>
+            <a:pPr marL="342900" indent="-342900">
+              <a:lnSpc>
+                <a:spcPct val="130000"/>
+              </a:lnSpc>
+              <a:buSzPct val="100000"/>
+              <a:buChar char="•"/>
+            </a:pPr>
+            <a:r>
+              <a:rPr lang="en-US" sz="1400" dirty="0">
                 <a:solidFill>
                   <a:srgbClr val="E2E8F0"/>
                 </a:solidFill>
-                <a:latin typeface="Consolas" pitchFamily="34" charset="0"/>
-                <a:ea typeface="Consolas" pitchFamily="34" charset="-122"/>
-                <a:cs typeface="Consolas" pitchFamily="34" charset="-120"/>
-              </a:rPr>
-              <a:t>import java.util.*;</a:t>
-            </a:r>
-            <a:endParaRPr lang="en-US" sz="1100" dirty="0"/>
-          </a:p>
-          <a:p>
-            <a:pPr indent="0" marL="0">
-              <a:buNone/>
-            </a:pPr>
-            <a:endParaRPr lang="en-US" sz="1100" dirty="0"/>
-          </a:p>
-          <a:p>
-            <a:pPr indent="0" marL="0">
-              <a:buNone/>
-            </a:pPr>
-            <a:r>
-              <a:rPr lang="en-US" sz="1100" dirty="0">
-                <a:solidFill>
-                  <a:srgbClr val="7C3AED"/>
-                </a:solidFill>
-                <a:latin typeface="Consolas" pitchFamily="34" charset="0"/>
-                <a:ea typeface="Consolas" pitchFamily="34" charset="-122"/>
-                <a:cs typeface="Consolas" pitchFamily="34" charset="-120"/>
-              </a:rPr>
-              <a:t>public class Benchmark {</a:t>
-            </a:r>
-            <a:endParaRPr lang="en-US" sz="1100" dirty="0"/>
-          </a:p>
-          <a:p>
-            <a:pPr indent="0" marL="0">
-              <a:buNone/>
-            </a:pPr>
-            <a:r>
-              <a:rPr lang="en-US" sz="1100" dirty="0">
-                <a:solidFill>
-                  <a:srgbClr val="7C3AED"/>
-                </a:solidFill>
-                <a:latin typeface="Consolas" pitchFamily="34" charset="0"/>
-                <a:ea typeface="Consolas" pitchFamily="34" charset="-122"/>
-                <a:cs typeface="Consolas" pitchFamily="34" charset="-120"/>
-              </a:rPr>
-              <a:t>    public static void main(String[] args) {</a:t>
-            </a:r>
-            <a:endParaRPr lang="en-US" sz="1100" dirty="0"/>
-          </a:p>
-          <a:p>
-            <a:pPr indent="0" marL="0">
-              <a:buNone/>
-            </a:pPr>
-            <a:r>
-              <a:rPr lang="en-US" sz="1100" dirty="0">
+                <a:latin typeface="Calibri" pitchFamily="34" charset="0"/>
+                <a:ea typeface="Calibri" pitchFamily="34" charset="-122"/>
+                <a:cs typeface="Calibri" pitchFamily="34" charset="-120"/>
+              </a:rPr>
+              <a:t>Chaque instruction basique = 1 unité de temps</a:t>
+            </a:r>
+            <a:endParaRPr lang="en-US" sz="1400" dirty="0"/>
+          </a:p>
+          <a:p>
+            <a:pPr marL="342900" indent="-342900">
+              <a:lnSpc>
+                <a:spcPct val="130000"/>
+              </a:lnSpc>
+              <a:buSzPct val="100000"/>
+              <a:buChar char="•"/>
+            </a:pPr>
+            <a:r>
+              <a:rPr lang="en-US" sz="1400" dirty="0">
                 <a:solidFill>
                   <a:srgbClr val="E2E8F0"/>
                 </a:solidFill>
-                <a:latin typeface="Consolas" pitchFamily="34" charset="0"/>
-                <a:ea typeface="Consolas" pitchFamily="34" charset="-122"/>
-                <a:cs typeface="Consolas" pitchFamily="34" charset="-120"/>
-              </a:rPr>
-              <a:t>        int N = 100000;</a:t>
-            </a:r>
-            <a:endParaRPr lang="en-US" sz="1100" dirty="0"/>
-          </a:p>
-          <a:p>
-            <a:pPr indent="0" marL="0">
-              <a:buNone/>
-            </a:pPr>
-            <a:r>
-              <a:rPr lang="en-US" sz="1100" dirty="0">
+                <a:latin typeface="Calibri" pitchFamily="34" charset="0"/>
+                <a:ea typeface="Calibri" pitchFamily="34" charset="-122"/>
+                <a:cs typeface="Calibri" pitchFamily="34" charset="-120"/>
+              </a:rPr>
+              <a:t>Boucle simple de 0 à n = O(n)</a:t>
+            </a:r>
+            <a:endParaRPr lang="en-US" sz="1400" dirty="0"/>
+          </a:p>
+          <a:p>
+            <a:pPr marL="342900" indent="-342900">
+              <a:lnSpc>
+                <a:spcPct val="130000"/>
+              </a:lnSpc>
+              <a:buSzPct val="100000"/>
+              <a:buChar char="•"/>
+            </a:pPr>
+            <a:r>
+              <a:rPr lang="en-US" sz="1400" dirty="0">
                 <a:solidFill>
                   <a:srgbClr val="E2E8F0"/>
                 </a:solidFill>
-                <a:latin typeface="Consolas" pitchFamily="34" charset="0"/>
-                <a:ea typeface="Consolas" pitchFamily="34" charset="-122"/>
-                <a:cs typeface="Consolas" pitchFamily="34" charset="-120"/>
-              </a:rPr>
-              <a:t>        </a:t>
-            </a:r>
-            <a:endParaRPr lang="en-US" sz="1100" dirty="0"/>
-          </a:p>
-          <a:p>
-            <a:pPr indent="0" marL="0">
-              <a:buNone/>
-            </a:pPr>
-            <a:r>
-              <a:rPr lang="en-US" sz="1100" dirty="0">
-                <a:solidFill>
-                  <a:srgbClr val="64748B"/>
-                </a:solidFill>
-                <a:latin typeface="Consolas" pitchFamily="34" charset="0"/>
-                <a:ea typeface="Consolas" pitchFamily="34" charset="-122"/>
-                <a:cs typeface="Consolas" pitchFamily="34" charset="-120"/>
-              </a:rPr>
-              <a:t>        // Remplir les deux structures</a:t>
-            </a:r>
-            <a:endParaRPr lang="en-US" sz="1100" dirty="0"/>
-          </a:p>
-          <a:p>
-            <a:pPr indent="0" marL="0">
-              <a:buNone/>
-            </a:pPr>
-            <a:r>
-              <a:rPr lang="en-US" sz="1100" dirty="0">
+                <a:latin typeface="Calibri" pitchFamily="34" charset="0"/>
+                <a:ea typeface="Calibri" pitchFamily="34" charset="-122"/>
+                <a:cs typeface="Calibri" pitchFamily="34" charset="-120"/>
+              </a:rPr>
+              <a:t>Boucles imbriquées = O(n × m) ou O(n²)</a:t>
+            </a:r>
+            <a:endParaRPr lang="en-US" sz="1400" dirty="0"/>
+          </a:p>
+          <a:p>
+            <a:pPr marL="342900" indent="-342900">
+              <a:lnSpc>
+                <a:spcPct val="130000"/>
+              </a:lnSpc>
+              <a:buSzPct val="100000"/>
+              <a:buChar char="•"/>
+            </a:pPr>
+            <a:r>
+              <a:rPr lang="en-US" sz="1400" dirty="0">
                 <a:solidFill>
                   <a:srgbClr val="E2E8F0"/>
                 </a:solidFill>
-                <a:latin typeface="Consolas" pitchFamily="34" charset="0"/>
-                <a:ea typeface="Consolas" pitchFamily="34" charset="-122"/>
-                <a:cs typeface="Consolas" pitchFamily="34" charset="-120"/>
-              </a:rPr>
-              <a:t>        ArrayList&lt;Integer&gt; arrayList = new ArrayList&lt;&gt;();</a:t>
-            </a:r>
-            <a:endParaRPr lang="en-US" sz="1100" dirty="0"/>
-          </a:p>
-          <a:p>
-            <a:pPr indent="0" marL="0">
-              <a:buNone/>
-            </a:pPr>
-            <a:r>
-              <a:rPr lang="en-US" sz="1100" dirty="0">
+                <a:latin typeface="Calibri" pitchFamily="34" charset="0"/>
+                <a:ea typeface="Calibri" pitchFamily="34" charset="-122"/>
+                <a:cs typeface="Calibri" pitchFamily="34" charset="-120"/>
+              </a:rPr>
+              <a:t>Division par 2 à chaque itération = O(log n)</a:t>
+            </a:r>
+            <a:endParaRPr lang="en-US" sz="1400" dirty="0"/>
+          </a:p>
+          <a:p>
+            <a:pPr marL="342900" indent="-342900">
+              <a:lnSpc>
+                <a:spcPct val="130000"/>
+              </a:lnSpc>
+              <a:buSzPct val="100000"/>
+              <a:buChar char="•"/>
+            </a:pPr>
+            <a:r>
+              <a:rPr lang="en-US" sz="1400" dirty="0">
                 <a:solidFill>
                   <a:srgbClr val="E2E8F0"/>
                 </a:solidFill>
-                <a:latin typeface="Consolas" pitchFamily="34" charset="0"/>
-                <a:ea typeface="Consolas" pitchFamily="34" charset="-122"/>
-                <a:cs typeface="Consolas" pitchFamily="34" charset="-120"/>
-              </a:rPr>
-              <a:t>        LinkedList&lt;Integer&gt; linkedList = new LinkedList&lt;&gt;();</a:t>
-            </a:r>
-            <a:endParaRPr lang="en-US" sz="1100" dirty="0"/>
-          </a:p>
-          <a:p>
-            <a:pPr indent="0" marL="0">
-              <a:buNone/>
-            </a:pPr>
-            <a:r>
-              <a:rPr lang="en-US" sz="1100" dirty="0">
+                <a:latin typeface="Calibri" pitchFamily="34" charset="0"/>
+                <a:ea typeface="Calibri" pitchFamily="34" charset="-122"/>
+                <a:cs typeface="Calibri" pitchFamily="34" charset="-120"/>
+              </a:rPr>
+              <a:t>On garde le TERME DOMINANT : O(n² + n) = O(n²)</a:t>
+            </a:r>
+            <a:endParaRPr lang="en-US" sz="1400" dirty="0"/>
+          </a:p>
+          <a:p>
+            <a:pPr marL="342900" indent="-342900">
+              <a:lnSpc>
+                <a:spcPct val="130000"/>
+              </a:lnSpc>
+              <a:buSzPct val="100000"/>
+              <a:buChar char="•"/>
+            </a:pPr>
+            <a:r>
+              <a:rPr lang="en-US" sz="1400" dirty="0">
                 <a:solidFill>
                   <a:srgbClr val="E2E8F0"/>
                 </a:solidFill>
-                <a:latin typeface="Consolas" pitchFamily="34" charset="0"/>
-                <a:ea typeface="Consolas" pitchFamily="34" charset="-122"/>
-                <a:cs typeface="Consolas" pitchFamily="34" charset="-120"/>
-              </a:rPr>
-              <a:t>        for (int i = 0; i &lt; N; i++) {</a:t>
-            </a:r>
-            <a:endParaRPr lang="en-US" sz="1100" dirty="0"/>
-          </a:p>
-          <a:p>
-            <a:pPr indent="0" marL="0">
-              <a:buNone/>
-            </a:pPr>
-            <a:r>
-              <a:rPr lang="en-US" sz="1100" dirty="0">
-                <a:solidFill>
-                  <a:srgbClr val="E2E8F0"/>
-                </a:solidFill>
-                <a:latin typeface="Consolas" pitchFamily="34" charset="0"/>
-                <a:ea typeface="Consolas" pitchFamily="34" charset="-122"/>
-                <a:cs typeface="Consolas" pitchFamily="34" charset="-120"/>
-              </a:rPr>
-              <a:t>            arrayList.add(i);</a:t>
-            </a:r>
-            <a:endParaRPr lang="en-US" sz="1100" dirty="0"/>
-          </a:p>
-          <a:p>
-            <a:pPr indent="0" marL="0">
-              <a:buNone/>
-            </a:pPr>
-            <a:r>
-              <a:rPr lang="en-US" sz="1100" dirty="0">
-                <a:solidFill>
-                  <a:srgbClr val="E2E8F0"/>
-                </a:solidFill>
-                <a:latin typeface="Consolas" pitchFamily="34" charset="0"/>
-                <a:ea typeface="Consolas" pitchFamily="34" charset="-122"/>
-                <a:cs typeface="Consolas" pitchFamily="34" charset="-120"/>
-              </a:rPr>
-              <a:t>            linkedList.add(i);</a:t>
-            </a:r>
-            <a:endParaRPr lang="en-US" sz="1100" dirty="0"/>
-          </a:p>
-          <a:p>
-            <a:pPr indent="0" marL="0">
-              <a:buNone/>
-            </a:pPr>
-            <a:r>
-              <a:rPr lang="en-US" sz="1100" dirty="0">
-                <a:solidFill>
-                  <a:srgbClr val="E2E8F0"/>
-                </a:solidFill>
-                <a:latin typeface="Consolas" pitchFamily="34" charset="0"/>
-                <a:ea typeface="Consolas" pitchFamily="34" charset="-122"/>
-                <a:cs typeface="Consolas" pitchFamily="34" charset="-120"/>
-              </a:rPr>
-              <a:t>        }</a:t>
-            </a:r>
-            <a:endParaRPr lang="en-US" sz="1100" dirty="0"/>
-          </a:p>
-          <a:p>
-            <a:pPr indent="0" marL="0">
-              <a:buNone/>
-            </a:pPr>
-            <a:r>
-              <a:rPr lang="en-US" sz="1100" dirty="0">
-                <a:solidFill>
-                  <a:srgbClr val="E2E8F0"/>
-                </a:solidFill>
-                <a:latin typeface="Consolas" pitchFamily="34" charset="0"/>
-                <a:ea typeface="Consolas" pitchFamily="34" charset="-122"/>
-                <a:cs typeface="Consolas" pitchFamily="34" charset="-120"/>
-              </a:rPr>
-              <a:t>        </a:t>
-            </a:r>
-            <a:endParaRPr lang="en-US" sz="1100" dirty="0"/>
-          </a:p>
-          <a:p>
-            <a:pPr indent="0" marL="0">
-              <a:buNone/>
-            </a:pPr>
-            <a:r>
-              <a:rPr lang="en-US" sz="1100" dirty="0">
-                <a:solidFill>
-                  <a:srgbClr val="64748B"/>
-                </a:solidFill>
-                <a:latin typeface="Consolas" pitchFamily="34" charset="0"/>
-                <a:ea typeface="Consolas" pitchFamily="34" charset="-122"/>
-                <a:cs typeface="Consolas" pitchFamily="34" charset="-120"/>
-              </a:rPr>
-              <a:t>        // Benchmark ArrayList.get()</a:t>
-            </a:r>
-            <a:endParaRPr lang="en-US" sz="1100" dirty="0"/>
-          </a:p>
-          <a:p>
-            <a:pPr indent="0" marL="0">
-              <a:buNone/>
-            </a:pPr>
-            <a:r>
-              <a:rPr lang="en-US" sz="1100" dirty="0">
-                <a:solidFill>
-                  <a:srgbClr val="E2E8F0"/>
-                </a:solidFill>
-                <a:latin typeface="Consolas" pitchFamily="34" charset="0"/>
-                <a:ea typeface="Consolas" pitchFamily="34" charset="-122"/>
-                <a:cs typeface="Consolas" pitchFamily="34" charset="-120"/>
-              </a:rPr>
-              <a:t>        long start = System.nanoTime();</a:t>
-            </a:r>
-            <a:endParaRPr lang="en-US" sz="1100" dirty="0"/>
-          </a:p>
-          <a:p>
-            <a:pPr indent="0" marL="0">
-              <a:buNone/>
-            </a:pPr>
-            <a:r>
-              <a:rPr lang="en-US" sz="1100" dirty="0">
-                <a:solidFill>
-                  <a:srgbClr val="E2E8F0"/>
-                </a:solidFill>
-                <a:latin typeface="Consolas" pitchFamily="34" charset="0"/>
-                <a:ea typeface="Consolas" pitchFamily="34" charset="-122"/>
-                <a:cs typeface="Consolas" pitchFamily="34" charset="-120"/>
-              </a:rPr>
-              <a:t>        for (int i = 0; i &lt; 1000; i++)</a:t>
-            </a:r>
-            <a:endParaRPr lang="en-US" sz="1100" dirty="0"/>
-          </a:p>
-          <a:p>
-            <a:pPr indent="0" marL="0">
-              <a:buNone/>
-            </a:pPr>
-            <a:r>
-              <a:rPr lang="en-US" sz="1100" dirty="0">
-                <a:solidFill>
-                  <a:srgbClr val="E2E8F0"/>
-                </a:solidFill>
-                <a:latin typeface="Consolas" pitchFamily="34" charset="0"/>
-                <a:ea typeface="Consolas" pitchFamily="34" charset="-122"/>
-                <a:cs typeface="Consolas" pitchFamily="34" charset="-120"/>
-              </a:rPr>
-              <a:t>            arrayList.get(N / 2);  // accès milieu</a:t>
-            </a:r>
-            <a:endParaRPr lang="en-US" sz="1100" dirty="0"/>
-          </a:p>
-          <a:p>
-            <a:pPr indent="0" marL="0">
-              <a:buNone/>
-            </a:pPr>
-            <a:r>
-              <a:rPr lang="en-US" sz="1100" dirty="0">
-                <a:solidFill>
-                  <a:srgbClr val="E2E8F0"/>
-                </a:solidFill>
-                <a:latin typeface="Consolas" pitchFamily="34" charset="0"/>
-                <a:ea typeface="Consolas" pitchFamily="34" charset="-122"/>
-                <a:cs typeface="Consolas" pitchFamily="34" charset="-120"/>
-              </a:rPr>
-              <a:t>        long timeAL = (System.nanoTime() - start) / 1_000_000;</a:t>
-            </a:r>
-            <a:endParaRPr lang="en-US" sz="1100" dirty="0"/>
-          </a:p>
-          <a:p>
-            <a:pPr indent="0" marL="0">
-              <a:buNone/>
-            </a:pPr>
-            <a:r>
-              <a:rPr lang="en-US" sz="1100" dirty="0">
-                <a:solidFill>
-                  <a:srgbClr val="E2E8F0"/>
-                </a:solidFill>
-                <a:latin typeface="Consolas" pitchFamily="34" charset="0"/>
-                <a:ea typeface="Consolas" pitchFamily="34" charset="-122"/>
-                <a:cs typeface="Consolas" pitchFamily="34" charset="-120"/>
-              </a:rPr>
-              <a:t>        </a:t>
-            </a:r>
-            <a:endParaRPr lang="en-US" sz="1100" dirty="0"/>
-          </a:p>
-          <a:p>
-            <a:pPr indent="0" marL="0">
-              <a:buNone/>
-            </a:pPr>
-            <a:r>
-              <a:rPr lang="en-US" sz="1100" dirty="0">
-                <a:solidFill>
-                  <a:srgbClr val="64748B"/>
-                </a:solidFill>
-                <a:latin typeface="Consolas" pitchFamily="34" charset="0"/>
-                <a:ea typeface="Consolas" pitchFamily="34" charset="-122"/>
-                <a:cs typeface="Consolas" pitchFamily="34" charset="-120"/>
-              </a:rPr>
-              <a:t>        // Benchmark LinkedList.get()</a:t>
-            </a:r>
-            <a:endParaRPr lang="en-US" sz="1100" dirty="0"/>
-          </a:p>
-          <a:p>
-            <a:pPr indent="0" marL="0">
-              <a:buNone/>
-            </a:pPr>
-            <a:r>
-              <a:rPr lang="en-US" sz="1100" dirty="0">
-                <a:solidFill>
-                  <a:srgbClr val="E2E8F0"/>
-                </a:solidFill>
-                <a:latin typeface="Consolas" pitchFamily="34" charset="0"/>
-                <a:ea typeface="Consolas" pitchFamily="34" charset="-122"/>
-                <a:cs typeface="Consolas" pitchFamily="34" charset="-120"/>
-              </a:rPr>
-              <a:t>        start = System.nanoTime();</a:t>
-            </a:r>
-            <a:endParaRPr lang="en-US" sz="1100" dirty="0"/>
-          </a:p>
-          <a:p>
-            <a:pPr indent="0" marL="0">
-              <a:buNone/>
-            </a:pPr>
-            <a:r>
-              <a:rPr lang="en-US" sz="1100" dirty="0">
-                <a:solidFill>
-                  <a:srgbClr val="E2E8F0"/>
-                </a:solidFill>
-                <a:latin typeface="Consolas" pitchFamily="34" charset="0"/>
-                <a:ea typeface="Consolas" pitchFamily="34" charset="-122"/>
-                <a:cs typeface="Consolas" pitchFamily="34" charset="-120"/>
-              </a:rPr>
-              <a:t>        for (int i = 0; i &lt; 1000; i++)</a:t>
-            </a:r>
-            <a:endParaRPr lang="en-US" sz="1100" dirty="0"/>
-          </a:p>
-          <a:p>
-            <a:pPr indent="0" marL="0">
-              <a:buNone/>
-            </a:pPr>
-            <a:r>
-              <a:rPr lang="en-US" sz="1100" dirty="0">
-                <a:solidFill>
-                  <a:srgbClr val="E2E8F0"/>
-                </a:solidFill>
-                <a:latin typeface="Consolas" pitchFamily="34" charset="0"/>
-                <a:ea typeface="Consolas" pitchFamily="34" charset="-122"/>
-                <a:cs typeface="Consolas" pitchFamily="34" charset="-120"/>
-              </a:rPr>
-              <a:t>            linkedList.get(N / 2);  // accès milieu</a:t>
-            </a:r>
-            <a:endParaRPr lang="en-US" sz="1100" dirty="0"/>
-          </a:p>
-          <a:p>
-            <a:pPr indent="0" marL="0">
-              <a:buNone/>
-            </a:pPr>
-            <a:r>
-              <a:rPr lang="en-US" sz="1100" dirty="0">
-                <a:solidFill>
-                  <a:srgbClr val="E2E8F0"/>
-                </a:solidFill>
-                <a:latin typeface="Consolas" pitchFamily="34" charset="0"/>
-                <a:ea typeface="Consolas" pitchFamily="34" charset="-122"/>
-                <a:cs typeface="Consolas" pitchFamily="34" charset="-120"/>
-              </a:rPr>
-              <a:t>        long timeLL = (System.nanoTime() - start) / 1_000_000;</a:t>
-            </a:r>
-            <a:endParaRPr lang="en-US" sz="1100" dirty="0"/>
-          </a:p>
-          <a:p>
-            <a:pPr indent="0" marL="0">
-              <a:buNone/>
-            </a:pPr>
-            <a:r>
-              <a:rPr lang="en-US" sz="1100" dirty="0">
-                <a:solidFill>
-                  <a:srgbClr val="E2E8F0"/>
-                </a:solidFill>
-                <a:latin typeface="Consolas" pitchFamily="34" charset="0"/>
-                <a:ea typeface="Consolas" pitchFamily="34" charset="-122"/>
-                <a:cs typeface="Consolas" pitchFamily="34" charset="-120"/>
-              </a:rPr>
-              <a:t>        </a:t>
-            </a:r>
-            <a:endParaRPr lang="en-US" sz="1100" dirty="0"/>
-          </a:p>
-          <a:p>
-            <a:pPr indent="0" marL="0">
-              <a:buNone/>
-            </a:pPr>
-            <a:r>
-              <a:rPr lang="en-US" sz="1100" dirty="0">
-                <a:solidFill>
-                  <a:srgbClr val="E2E8F0"/>
-                </a:solidFill>
-                <a:latin typeface="Consolas" pitchFamily="34" charset="0"/>
-                <a:ea typeface="Consolas" pitchFamily="34" charset="-122"/>
-                <a:cs typeface="Consolas" pitchFamily="34" charset="-120"/>
-              </a:rPr>
-              <a:t>        System.out.println("ArrayList.get() : " + timeAL + " ms");</a:t>
-            </a:r>
-            <a:endParaRPr lang="en-US" sz="1100" dirty="0"/>
-          </a:p>
-          <a:p>
-            <a:pPr indent="0" marL="0">
-              <a:buNone/>
-            </a:pPr>
-            <a:r>
-              <a:rPr lang="en-US" sz="1100" dirty="0">
-                <a:solidFill>
-                  <a:srgbClr val="E2E8F0"/>
-                </a:solidFill>
-                <a:latin typeface="Consolas" pitchFamily="34" charset="0"/>
-                <a:ea typeface="Consolas" pitchFamily="34" charset="-122"/>
-                <a:cs typeface="Consolas" pitchFamily="34" charset="-120"/>
-              </a:rPr>
-              <a:t>        System.out.println("LinkedList.get(): " + timeLL + " ms");</a:t>
-            </a:r>
-            <a:endParaRPr lang="en-US" sz="1100" dirty="0"/>
-          </a:p>
-          <a:p>
-            <a:pPr indent="0" marL="0">
-              <a:buNone/>
-            </a:pPr>
-            <a:r>
-              <a:rPr lang="en-US" sz="1100" dirty="0">
-                <a:solidFill>
-                  <a:srgbClr val="64748B"/>
-                </a:solidFill>
-                <a:latin typeface="Consolas" pitchFamily="34" charset="0"/>
-                <a:ea typeface="Consolas" pitchFamily="34" charset="-122"/>
-                <a:cs typeface="Consolas" pitchFamily="34" charset="-120"/>
-              </a:rPr>
-              <a:t>        // ArrayList sera ~100-1000x plus rapide !</a:t>
-            </a:r>
-            <a:endParaRPr lang="en-US" sz="1100" dirty="0"/>
-          </a:p>
-          <a:p>
-            <a:pPr indent="0" marL="0">
-              <a:buNone/>
-            </a:pPr>
-            <a:r>
-              <a:rPr lang="en-US" sz="1100" dirty="0">
-                <a:solidFill>
-                  <a:srgbClr val="E2E8F0"/>
-                </a:solidFill>
-                <a:latin typeface="Consolas" pitchFamily="34" charset="0"/>
-                <a:ea typeface="Consolas" pitchFamily="34" charset="-122"/>
-                <a:cs typeface="Consolas" pitchFamily="34" charset="-120"/>
-              </a:rPr>
-              <a:t>    }</a:t>
-            </a:r>
-            <a:endParaRPr lang="en-US" sz="1100" dirty="0"/>
-          </a:p>
-          <a:p>
-            <a:pPr indent="0" marL="0">
-              <a:buNone/>
-            </a:pPr>
-            <a:r>
-              <a:rPr lang="en-US" sz="1100" dirty="0">
-                <a:solidFill>
-                  <a:srgbClr val="E2E8F0"/>
-                </a:solidFill>
-                <a:latin typeface="Consolas" pitchFamily="34" charset="0"/>
-                <a:ea typeface="Consolas" pitchFamily="34" charset="-122"/>
-                <a:cs typeface="Consolas" pitchFamily="34" charset="-120"/>
-              </a:rPr>
-              <a:t>}</a:t>
-            </a:r>
-            <a:endParaRPr lang="en-US" sz="1100" dirty="0"/>
+                <a:latin typeface="Calibri" pitchFamily="34" charset="0"/>
+                <a:ea typeface="Calibri" pitchFamily="34" charset="-122"/>
+                <a:cs typeface="Calibri" pitchFamily="34" charset="-120"/>
+              </a:rPr>
+              <a:t>On ignore les CONSTANTES : O(2n) = O(n)</a:t>
+            </a:r>
+            <a:endParaRPr lang="en-US" sz="1400" dirty="0"/>
           </a:p>
         </p:txBody>
       </p:sp>
@@ -2825,7 +2195,7 @@
     <p:bg>
       <p:bgPr>
         <a:solidFill>
-          <a:srgbClr val="0F172A"/>
+          <a:srgbClr val="1A0D00"/>
         </a:solidFill>
       </p:bgPr>
     </p:bg>
@@ -2845,62 +2215,64 @@
       </p:grpSpPr>
       <p:sp>
         <p:nvSpPr>
-          <p:cNvPr id="2" name="Shape 0"/>
+          <p:cNvPr id="2" name="Text 0"/>
           <p:cNvSpPr/>
           <p:nvPr/>
         </p:nvSpPr>
         <p:spPr>
           <a:xfrm>
-            <a:off x="0" y="0"/>
-            <a:ext cx="9144000" cy="73152"/>
-          </a:xfrm>
-          <a:prstGeom prst="rect">
-            <a:avLst/>
+            <a:off x="548640" y="274320"/>
+            <a:ext cx="8229600" cy="548640"/>
+          </a:xfrm>
+          <a:prstGeom prst="rect">
+            <a:avLst/>
+          </a:prstGeom>
+          <a:noFill/>
+          <a:ln/>
+        </p:spPr>
+        <p:txBody>
+          <a:bodyPr wrap="square" rtlCol="0" anchor="ctr"/>
+          <a:lstStyle/>
+          <a:p>
+            <a:pPr indent="0" marL="0">
+              <a:buNone/>
+            </a:pPr>
+            <a:r>
+              <a:rPr lang="en-US" sz="2800" b="1" dirty="0">
+                <a:solidFill>
+                  <a:srgbClr val="FFFFFF"/>
+                </a:solidFill>
+                <a:latin typeface="Calibri" pitchFamily="34" charset="0"/>
+                <a:ea typeface="Calibri" pitchFamily="34" charset="-122"/>
+                <a:cs typeface="Calibri" pitchFamily="34" charset="-120"/>
+              </a:rPr>
+              <a:t>Récapitulatif</a:t>
+            </a:r>
+            <a:endParaRPr lang="en-US" sz="2800" dirty="0"/>
+          </a:p>
+        </p:txBody>
+      </p:sp>
+      <p:sp>
+        <p:nvSpPr>
+          <p:cNvPr id="3" name="Shape 1"/>
+          <p:cNvSpPr/>
+          <p:nvPr/>
+        </p:nvSpPr>
+        <p:spPr>
+          <a:xfrm>
+            <a:off x="548640" y="1097280"/>
+            <a:ext cx="2621280" cy="3200400"/>
+          </a:xfrm>
+          <a:prstGeom prst="roundRect">
+            <a:avLst>
+              <a:gd name="adj" fmla="val 3488"/>
+            </a:avLst>
           </a:prstGeom>
           <a:solidFill>
-            <a:srgbClr val="DC2626"/>
+            <a:srgbClr val="2D1A00"/>
           </a:solidFill>
           <a:ln/>
         </p:spPr>
-      </p:sp>
-      <p:sp>
-        <p:nvSpPr>
-          <p:cNvPr id="3" name="Text 1"/>
-          <p:cNvSpPr/>
-          <p:nvPr/>
-        </p:nvSpPr>
-        <p:spPr>
-          <a:xfrm>
-            <a:off x="457200" y="182880"/>
-            <a:ext cx="7315200" cy="457200"/>
-          </a:xfrm>
-          <a:prstGeom prst="rect">
-            <a:avLst/>
-          </a:prstGeom>
-          <a:noFill/>
-          <a:ln/>
-        </p:spPr>
-        <p:txBody>
-          <a:bodyPr wrap="square" rtlCol="0" anchor="ctr"/>
-          <a:lstStyle/>
-          <a:p>
-            <a:pPr indent="0" marL="0">
-              <a:buNone/>
-            </a:pPr>
-            <a:r>
-              <a:rPr lang="en-US" sz="2200" b="1" dirty="0">
-                <a:solidFill>
-                  <a:srgbClr val="DC2626"/>
-                </a:solidFill>
-                <a:latin typeface="Trebuchet MS" pitchFamily="34" charset="0"/>
-                <a:ea typeface="Trebuchet MS" pitchFamily="34" charset="-122"/>
-                <a:cs typeface="Trebuchet MS" pitchFamily="34" charset="-120"/>
-              </a:rPr>
-              <a:t>NOTES ENSEIGNANT — Ch.11 M4/D3 ADT+BigO</a:t>
-            </a:r>
-            <a:endParaRPr lang="en-US" sz="2200" dirty="0"/>
-          </a:p>
-        </p:txBody>
       </p:sp>
       <p:sp>
         <p:nvSpPr>
@@ -2910,8 +2282,8 @@
         </p:nvSpPr>
         <p:spPr>
           <a:xfrm>
-            <a:off x="457200" y="731520"/>
-            <a:ext cx="8229600" cy="4114800"/>
+            <a:off x="548640" y="1280160"/>
+            <a:ext cx="2621280" cy="457200"/>
           </a:xfrm>
           <a:prstGeom prst="rect">
             <a:avLst/>
@@ -2923,112 +2295,183 @@
           <a:bodyPr wrap="square" rtlCol="0" anchor="ctr"/>
           <a:lstStyle/>
           <a:p>
-            <a:pPr indent="0" marL="0">
+            <a:pPr algn="ctr" indent="0" marL="0">
               <a:buNone/>
             </a:pPr>
             <a:r>
-              <a:rPr lang="en-US" sz="1500" b="1" dirty="0">
-                <a:solidFill>
-                  <a:srgbClr val="00A896"/>
-                </a:solidFill>
-                <a:latin typeface="Trebuchet MS" pitchFamily="34" charset="0"/>
-                <a:ea typeface="Trebuchet MS" pitchFamily="34" charset="-122"/>
-                <a:cs typeface="Trebuchet MS" pitchFamily="34" charset="-120"/>
-              </a:rPr>
-              <a:t>Plan de séance :</a:t>
-            </a:r>
-            <a:endParaRPr lang="en-US" sz="1500" dirty="0"/>
-          </a:p>
-          <a:p>
-            <a:pPr indent="0" marL="0">
+              <a:rPr lang="en-US" sz="2800" dirty="0">
+                <a:solidFill>
+                  <a:srgbClr val="000000"/>
+                </a:solidFill>
+              </a:rPr>
+              <a:t>🎯</a:t>
+            </a:r>
+            <a:endParaRPr lang="en-US" sz="2800" dirty="0"/>
+          </a:p>
+        </p:txBody>
+      </p:sp>
+      <p:sp>
+        <p:nvSpPr>
+          <p:cNvPr id="5" name="Text 3"/>
+          <p:cNvSpPr/>
+          <p:nvPr/>
+        </p:nvSpPr>
+        <p:spPr>
+          <a:xfrm>
+            <a:off x="685800" y="1828800"/>
+            <a:ext cx="2346960" cy="365760"/>
+          </a:xfrm>
+          <a:prstGeom prst="rect">
+            <a:avLst/>
+          </a:prstGeom>
+          <a:noFill/>
+          <a:ln/>
+        </p:spPr>
+        <p:txBody>
+          <a:bodyPr wrap="square" rtlCol="0" anchor="ctr"/>
+          <a:lstStyle/>
+          <a:p>
+            <a:pPr algn="ctr" indent="0" marL="0">
               <a:buNone/>
             </a:pPr>
-            <a:endParaRPr lang="en-US" sz="1500" dirty="0"/>
-          </a:p>
-          <a:p>
-            <a:pPr marL="342900" indent="-342900">
-              <a:buSzPct val="100000"/>
-              <a:buChar char="•"/>
-            </a:pPr>
-            <a:r>
-              <a:rPr lang="en-US" sz="1200" dirty="0">
-                <a:solidFill>
-                  <a:srgbClr val="E2E8F0"/>
-                </a:solidFill>
-                <a:latin typeface="Calibri" pitchFamily="34" charset="0"/>
-                <a:ea typeface="Calibri" pitchFamily="34" charset="-122"/>
-                <a:cs typeface="Calibri" pitchFamily="34" charset="-120"/>
-              </a:rPr>
-              <a:t>P1 : Comment DÉMONTRER qu'un ADT résout un problème (structure du rapport)</a:t>
-            </a:r>
-            <a:endParaRPr lang="en-US" sz="1500" dirty="0"/>
-          </a:p>
-          <a:p>
-            <a:pPr marL="342900" indent="-342900">
-              <a:buSzPct val="100000"/>
-              <a:buChar char="•"/>
-            </a:pPr>
-            <a:r>
-              <a:rPr lang="en-US" sz="1200" dirty="0">
-                <a:solidFill>
-                  <a:srgbClr val="E2E8F0"/>
-                </a:solidFill>
-                <a:latin typeface="Calibri" pitchFamily="34" charset="0"/>
-                <a:ea typeface="Calibri" pitchFamily="34" charset="-122"/>
-                <a:cs typeface="Calibri" pitchFamily="34" charset="-120"/>
-              </a:rPr>
-              <a:t>P2 : Big O de chaque opération — tableau récapitulatif</a:t>
-            </a:r>
-            <a:endParaRPr lang="en-US" sz="1500" dirty="0"/>
-          </a:p>
-          <a:p>
-            <a:pPr marL="342900" indent="-342900">
-              <a:buSzPct val="100000"/>
-              <a:buChar char="•"/>
-            </a:pPr>
-            <a:r>
-              <a:rPr lang="en-US" sz="1200" dirty="0">
-                <a:solidFill>
-                  <a:srgbClr val="E2E8F0"/>
-                </a:solidFill>
-                <a:latin typeface="Calibri" pitchFamily="34" charset="0"/>
-                <a:ea typeface="Calibri" pitchFamily="34" charset="-122"/>
-                <a:cs typeface="Calibri" pitchFamily="34" charset="-120"/>
-              </a:rPr>
-              <a:t>P3 : Live coding benchmark + mini-jeu (identifier Big O)</a:t>
-            </a:r>
-            <a:endParaRPr lang="en-US" sz="1500" dirty="0"/>
-          </a:p>
-          <a:p>
-            <a:pPr marL="342900" indent="-342900">
-              <a:buSzPct val="100000"/>
-              <a:buChar char="•"/>
-            </a:pPr>
-            <a:r>
-              <a:rPr lang="en-US" sz="1200" dirty="0">
-                <a:solidFill>
-                  <a:srgbClr val="E2E8F0"/>
-                </a:solidFill>
-                <a:latin typeface="Calibri" pitchFamily="34" charset="0"/>
-                <a:ea typeface="Calibri" pitchFamily="34" charset="-122"/>
-                <a:cs typeface="Calibri" pitchFamily="34" charset="-120"/>
-              </a:rPr>
-              <a:t>P4 : Exercice : analyser un projet complet (complexité + justification)</a:t>
-            </a:r>
-            <a:endParaRPr lang="en-US" sz="1500" dirty="0"/>
-          </a:p>
-          <a:p>
-            <a:pPr indent="0" marL="0">
+            <a:r>
+              <a:rPr lang="en-US" sz="1300" b="1" dirty="0">
+                <a:solidFill>
+                  <a:srgbClr val="F97316"/>
+                </a:solidFill>
+                <a:latin typeface="Calibri" pitchFamily="34" charset="0"/>
+                <a:ea typeface="Calibri" pitchFamily="34" charset="-122"/>
+                <a:cs typeface="Calibri" pitchFamily="34" charset="-120"/>
+              </a:rPr>
+              <a:t>M4</a:t>
+            </a:r>
+            <a:endParaRPr lang="en-US" sz="1300" dirty="0"/>
+          </a:p>
+        </p:txBody>
+      </p:sp>
+      <p:sp>
+        <p:nvSpPr>
+          <p:cNvPr id="6" name="Text 4"/>
+          <p:cNvSpPr/>
+          <p:nvPr/>
+        </p:nvSpPr>
+        <p:spPr>
+          <a:xfrm>
+            <a:off x="685800" y="2286000"/>
+            <a:ext cx="2346960" cy="1828800"/>
+          </a:xfrm>
+          <a:prstGeom prst="rect">
+            <a:avLst/>
+          </a:prstGeom>
+          <a:noFill/>
+          <a:ln/>
+        </p:spPr>
+        <p:txBody>
+          <a:bodyPr wrap="square" rtlCol="0" anchor="t"/>
+          <a:lstStyle/>
+          <a:p>
+            <a:pPr algn="ctr" indent="0" marL="0">
               <a:buNone/>
             </a:pPr>
-            <a:endParaRPr lang="en-US" sz="1500" dirty="0"/>
-          </a:p>
-          <a:p>
-            <a:pPr indent="0" marL="0">
+            <a:r>
+              <a:rPr lang="en-US" sz="1100" dirty="0">
+                <a:solidFill>
+                  <a:srgbClr val="94A3B8"/>
+                </a:solidFill>
+                <a:latin typeface="Calibri" pitchFamily="34" charset="0"/>
+                <a:ea typeface="Calibri" pitchFamily="34" charset="-122"/>
+                <a:cs typeface="Calibri" pitchFamily="34" charset="-120"/>
+              </a:rPr>
+              <a:t>L'ADT résout un problème concret (choix justifié)</a:t>
+            </a:r>
+            <a:endParaRPr lang="en-US" sz="1100" dirty="0"/>
+          </a:p>
+        </p:txBody>
+      </p:sp>
+      <p:sp>
+        <p:nvSpPr>
+          <p:cNvPr id="7" name="Shape 5"/>
+          <p:cNvSpPr/>
+          <p:nvPr/>
+        </p:nvSpPr>
+        <p:spPr>
+          <a:xfrm>
+            <a:off x="3352800" y="1097280"/>
+            <a:ext cx="2621280" cy="3200400"/>
+          </a:xfrm>
+          <a:prstGeom prst="roundRect">
+            <a:avLst>
+              <a:gd name="adj" fmla="val 3488"/>
+            </a:avLst>
+          </a:prstGeom>
+          <a:solidFill>
+            <a:srgbClr val="2D1A00"/>
+          </a:solidFill>
+          <a:ln/>
+        </p:spPr>
+      </p:sp>
+      <p:sp>
+        <p:nvSpPr>
+          <p:cNvPr id="8" name="Text 6"/>
+          <p:cNvSpPr/>
+          <p:nvPr/>
+        </p:nvSpPr>
+        <p:spPr>
+          <a:xfrm>
+            <a:off x="3352800" y="1280160"/>
+            <a:ext cx="2621280" cy="457200"/>
+          </a:xfrm>
+          <a:prstGeom prst="rect">
+            <a:avLst/>
+          </a:prstGeom>
+          <a:noFill/>
+          <a:ln/>
+        </p:spPr>
+        <p:txBody>
+          <a:bodyPr wrap="square" rtlCol="0" anchor="ctr"/>
+          <a:lstStyle/>
+          <a:p>
+            <a:pPr algn="ctr" indent="0" marL="0">
               <a:buNone/>
             </a:pPr>
             <a:r>
-              <a:rPr lang="en-US" sz="1400" b="1" dirty="0">
+              <a:rPr lang="en-US" sz="2800" dirty="0">
+                <a:solidFill>
+                  <a:srgbClr val="000000"/>
+                </a:solidFill>
+              </a:rPr>
+              <a:t>📊</a:t>
+            </a:r>
+            <a:endParaRPr lang="en-US" sz="2800" dirty="0"/>
+          </a:p>
+        </p:txBody>
+      </p:sp>
+      <p:sp>
+        <p:nvSpPr>
+          <p:cNvPr id="9" name="Text 7"/>
+          <p:cNvSpPr/>
+          <p:nvPr/>
+        </p:nvSpPr>
+        <p:spPr>
+          <a:xfrm>
+            <a:off x="3489960" y="1828800"/>
+            <a:ext cx="2346960" cy="365760"/>
+          </a:xfrm>
+          <a:prstGeom prst="rect">
+            <a:avLst/>
+          </a:prstGeom>
+          <a:noFill/>
+          <a:ln/>
+        </p:spPr>
+        <p:txBody>
+          <a:bodyPr wrap="square" rtlCol="0" anchor="ctr"/>
+          <a:lstStyle/>
+          <a:p>
+            <a:pPr algn="ctr" indent="0" marL="0">
+              <a:buNone/>
+            </a:pPr>
+            <a:r>
+              <a:rPr lang="en-US" sz="1300" b="1" dirty="0">
                 <a:solidFill>
                   <a:srgbClr val="F97316"/>
                 </a:solidFill>
@@ -3036,81 +2479,184 @@
                 <a:ea typeface="Calibri" pitchFamily="34" charset="-122"/>
                 <a:cs typeface="Calibri" pitchFamily="34" charset="-120"/>
               </a:rPr>
-              <a:t>Critère M4/D3 — l'étudiant doit :</a:t>
-            </a:r>
-            <a:endParaRPr lang="en-US" sz="1500" dirty="0"/>
-          </a:p>
-          <a:p>
-            <a:pPr marL="342900" indent="-342900">
-              <a:buSzPct val="100000"/>
-              <a:buChar char="•"/>
-            </a:pPr>
-            <a:r>
-              <a:rPr lang="en-US" sz="1200" dirty="0">
-                <a:solidFill>
-                  <a:srgbClr val="E2E8F0"/>
-                </a:solidFill>
-                <a:latin typeface="Calibri" pitchFamily="34" charset="0"/>
-                <a:ea typeface="Calibri" pitchFamily="34" charset="-122"/>
-                <a:cs typeface="Calibri" pitchFamily="34" charset="-120"/>
-              </a:rPr>
-              <a:t>M4 : Démontrer avec code + tests + screenshots que l'ADT résout le problème</a:t>
-            </a:r>
-            <a:endParaRPr lang="en-US" sz="1500" dirty="0"/>
-          </a:p>
-          <a:p>
-            <a:pPr marL="342900" indent="-342900">
-              <a:buSzPct val="100000"/>
-              <a:buChar char="•"/>
-            </a:pPr>
-            <a:r>
-              <a:rPr lang="en-US" sz="1200" dirty="0">
-                <a:solidFill>
-                  <a:srgbClr val="E2E8F0"/>
-                </a:solidFill>
-                <a:latin typeface="Calibri" pitchFamily="34" charset="0"/>
-                <a:ea typeface="Calibri" pitchFamily="34" charset="-122"/>
-                <a:cs typeface="Calibri" pitchFamily="34" charset="-120"/>
-              </a:rPr>
-              <a:t>D3 : Donner la complexité Big O de CHAQUE opération</a:t>
-            </a:r>
-            <a:endParaRPr lang="en-US" sz="1500" dirty="0"/>
-          </a:p>
-          <a:p>
-            <a:pPr marL="342900" indent="-342900">
-              <a:buSzPct val="100000"/>
-              <a:buChar char="•"/>
-            </a:pPr>
-            <a:r>
-              <a:rPr lang="en-US" sz="1200" dirty="0">
-                <a:solidFill>
-                  <a:srgbClr val="E2E8F0"/>
-                </a:solidFill>
-                <a:latin typeface="Calibri" pitchFamily="34" charset="0"/>
-                <a:ea typeface="Calibri" pitchFamily="34" charset="-122"/>
-                <a:cs typeface="Calibri" pitchFamily="34" charset="-120"/>
-              </a:rPr>
-              <a:t>D3 : Comparer avec une alternative et expliquer les trade-offs</a:t>
-            </a:r>
-            <a:endParaRPr lang="en-US" sz="1500" dirty="0"/>
-          </a:p>
-          <a:p>
-            <a:pPr marL="342900" indent="-342900">
-              <a:buSzPct val="100000"/>
-              <a:buChar char="•"/>
-            </a:pPr>
-            <a:r>
-              <a:rPr lang="en-US" sz="1200" dirty="0">
-                <a:solidFill>
-                  <a:srgbClr val="E2E8F0"/>
-                </a:solidFill>
-                <a:latin typeface="Calibri" pitchFamily="34" charset="0"/>
-                <a:ea typeface="Calibri" pitchFamily="34" charset="-122"/>
-                <a:cs typeface="Calibri" pitchFamily="34" charset="-120"/>
-              </a:rPr>
-              <a:t>D3 : Fournir un benchmark empirique pour appuyer l'analyse théorique</a:t>
-            </a:r>
-            <a:endParaRPr lang="en-US" sz="1500" dirty="0"/>
+              <a:t>D3</a:t>
+            </a:r>
+            <a:endParaRPr lang="en-US" sz="1300" dirty="0"/>
+          </a:p>
+        </p:txBody>
+      </p:sp>
+      <p:sp>
+        <p:nvSpPr>
+          <p:cNvPr id="10" name="Text 8"/>
+          <p:cNvSpPr/>
+          <p:nvPr/>
+        </p:nvSpPr>
+        <p:spPr>
+          <a:xfrm>
+            <a:off x="3489960" y="2286000"/>
+            <a:ext cx="2346960" cy="1828800"/>
+          </a:xfrm>
+          <a:prstGeom prst="rect">
+            <a:avLst/>
+          </a:prstGeom>
+          <a:noFill/>
+          <a:ln/>
+        </p:spPr>
+        <p:txBody>
+          <a:bodyPr wrap="square" rtlCol="0" anchor="t"/>
+          <a:lstStyle/>
+          <a:p>
+            <a:pPr algn="ctr" indent="0" marL="0">
+              <a:buNone/>
+            </a:pPr>
+            <a:r>
+              <a:rPr lang="en-US" sz="1100" dirty="0">
+                <a:solidFill>
+                  <a:srgbClr val="94A3B8"/>
+                </a:solidFill>
+                <a:latin typeface="Calibri" pitchFamily="34" charset="0"/>
+                <a:ea typeface="Calibri" pitchFamily="34" charset="-122"/>
+                <a:cs typeface="Calibri" pitchFamily="34" charset="-120"/>
+              </a:rPr>
+              <a:t>Évaluer la complexité de chaque opération</a:t>
+            </a:r>
+            <a:endParaRPr lang="en-US" sz="1100" dirty="0"/>
+          </a:p>
+        </p:txBody>
+      </p:sp>
+      <p:sp>
+        <p:nvSpPr>
+          <p:cNvPr id="11" name="Shape 9"/>
+          <p:cNvSpPr/>
+          <p:nvPr/>
+        </p:nvSpPr>
+        <p:spPr>
+          <a:xfrm>
+            <a:off x="6156960" y="1097280"/>
+            <a:ext cx="2621280" cy="3200400"/>
+          </a:xfrm>
+          <a:prstGeom prst="roundRect">
+            <a:avLst>
+              <a:gd name="adj" fmla="val 3488"/>
+            </a:avLst>
+          </a:prstGeom>
+          <a:solidFill>
+            <a:srgbClr val="2D1A00"/>
+          </a:solidFill>
+          <a:ln/>
+        </p:spPr>
+      </p:sp>
+      <p:sp>
+        <p:nvSpPr>
+          <p:cNvPr id="12" name="Text 10"/>
+          <p:cNvSpPr/>
+          <p:nvPr/>
+        </p:nvSpPr>
+        <p:spPr>
+          <a:xfrm>
+            <a:off x="6156960" y="1280160"/>
+            <a:ext cx="2621280" cy="457200"/>
+          </a:xfrm>
+          <a:prstGeom prst="rect">
+            <a:avLst/>
+          </a:prstGeom>
+          <a:noFill/>
+          <a:ln/>
+        </p:spPr>
+        <p:txBody>
+          <a:bodyPr wrap="square" rtlCol="0" anchor="ctr"/>
+          <a:lstStyle/>
+          <a:p>
+            <a:pPr algn="ctr" indent="0" marL="0">
+              <a:buNone/>
+            </a:pPr>
+            <a:r>
+              <a:rPr lang="en-US" sz="2800" dirty="0">
+                <a:solidFill>
+                  <a:srgbClr val="000000"/>
+                </a:solidFill>
+              </a:rPr>
+              <a:t>🔢</a:t>
+            </a:r>
+            <a:endParaRPr lang="en-US" sz="2800" dirty="0"/>
+          </a:p>
+        </p:txBody>
+      </p:sp>
+      <p:sp>
+        <p:nvSpPr>
+          <p:cNvPr id="13" name="Text 11"/>
+          <p:cNvSpPr/>
+          <p:nvPr/>
+        </p:nvSpPr>
+        <p:spPr>
+          <a:xfrm>
+            <a:off x="6294120" y="1828800"/>
+            <a:ext cx="2346960" cy="365760"/>
+          </a:xfrm>
+          <a:prstGeom prst="rect">
+            <a:avLst/>
+          </a:prstGeom>
+          <a:noFill/>
+          <a:ln/>
+        </p:spPr>
+        <p:txBody>
+          <a:bodyPr wrap="square" rtlCol="0" anchor="ctr"/>
+          <a:lstStyle/>
+          <a:p>
+            <a:pPr algn="ctr" indent="0" marL="0">
+              <a:buNone/>
+            </a:pPr>
+            <a:r>
+              <a:rPr lang="en-US" sz="1300" b="1" dirty="0">
+                <a:solidFill>
+                  <a:srgbClr val="F97316"/>
+                </a:solidFill>
+                <a:latin typeface="Calibri" pitchFamily="34" charset="0"/>
+                <a:ea typeface="Calibri" pitchFamily="34" charset="-122"/>
+                <a:cs typeface="Calibri" pitchFamily="34" charset="-120"/>
+              </a:rPr>
+              <a:t>Big O</a:t>
+            </a:r>
+            <a:endParaRPr lang="en-US" sz="1300" dirty="0"/>
+          </a:p>
+        </p:txBody>
+      </p:sp>
+      <p:sp>
+        <p:nvSpPr>
+          <p:cNvPr id="14" name="Text 12"/>
+          <p:cNvSpPr/>
+          <p:nvPr/>
+        </p:nvSpPr>
+        <p:spPr>
+          <a:xfrm>
+            <a:off x="6294120" y="2286000"/>
+            <a:ext cx="2346960" cy="1828800"/>
+          </a:xfrm>
+          <a:prstGeom prst="rect">
+            <a:avLst/>
+          </a:prstGeom>
+          <a:noFill/>
+          <a:ln/>
+        </p:spPr>
+        <p:txBody>
+          <a:bodyPr wrap="square" rtlCol="0" anchor="t"/>
+          <a:lstStyle/>
+          <a:p>
+            <a:pPr algn="ctr" indent="0" marL="0">
+              <a:buNone/>
+            </a:pPr>
+            <a:r>
+              <a:rPr lang="en-US" sz="1100" dirty="0">
+                <a:solidFill>
+                  <a:srgbClr val="94A3B8"/>
+                </a:solidFill>
+                <a:latin typeface="Calibri" pitchFamily="34" charset="0"/>
+                <a:ea typeface="Calibri" pitchFamily="34" charset="-122"/>
+                <a:cs typeface="Calibri" pitchFamily="34" charset="-120"/>
+              </a:rPr>
+              <a:t>Terme dominant, ignorer constantes</a:t>
+            </a:r>
+            <a:endParaRPr lang="en-US" sz="1100" dirty="0"/>
           </a:p>
         </p:txBody>
       </p:sp>
